--- a/ADM_GP_Presentation.pptx
+++ b/ADM_GP_Presentation.pptx
@@ -5,7 +5,7 @@
     <p:sldMasterId id="2147483648" r:id="rId1"/>
   </p:sldMasterIdLst>
   <p:notesMasterIdLst>
-    <p:notesMasterId r:id="rId40"/>
+    <p:notesMasterId r:id="rId41"/>
   </p:notesMasterIdLst>
   <p:sldIdLst>
     <p:sldId id="256" r:id="rId2"/>
@@ -26,26 +26,27 @@
     <p:sldId id="271" r:id="rId17"/>
     <p:sldId id="272" r:id="rId18"/>
     <p:sldId id="273" r:id="rId19"/>
-    <p:sldId id="274" r:id="rId20"/>
-    <p:sldId id="275" r:id="rId21"/>
-    <p:sldId id="276" r:id="rId22"/>
-    <p:sldId id="277" r:id="rId23"/>
-    <p:sldId id="278" r:id="rId24"/>
-    <p:sldId id="279" r:id="rId25"/>
-    <p:sldId id="280" r:id="rId26"/>
-    <p:sldId id="281" r:id="rId27"/>
-    <p:sldId id="282" r:id="rId28"/>
-    <p:sldId id="283" r:id="rId29"/>
-    <p:sldId id="284" r:id="rId30"/>
-    <p:sldId id="285" r:id="rId31"/>
-    <p:sldId id="286" r:id="rId32"/>
-    <p:sldId id="287" r:id="rId33"/>
-    <p:sldId id="288" r:id="rId34"/>
-    <p:sldId id="289" r:id="rId35"/>
-    <p:sldId id="290" r:id="rId36"/>
-    <p:sldId id="291" r:id="rId37"/>
-    <p:sldId id="292" r:id="rId38"/>
-    <p:sldId id="293" r:id="rId39"/>
+    <p:sldId id="294" r:id="rId20"/>
+    <p:sldId id="274" r:id="rId21"/>
+    <p:sldId id="275" r:id="rId22"/>
+    <p:sldId id="276" r:id="rId23"/>
+    <p:sldId id="277" r:id="rId24"/>
+    <p:sldId id="278" r:id="rId25"/>
+    <p:sldId id="279" r:id="rId26"/>
+    <p:sldId id="280" r:id="rId27"/>
+    <p:sldId id="281" r:id="rId28"/>
+    <p:sldId id="282" r:id="rId29"/>
+    <p:sldId id="283" r:id="rId30"/>
+    <p:sldId id="284" r:id="rId31"/>
+    <p:sldId id="285" r:id="rId32"/>
+    <p:sldId id="286" r:id="rId33"/>
+    <p:sldId id="287" r:id="rId34"/>
+    <p:sldId id="288" r:id="rId35"/>
+    <p:sldId id="289" r:id="rId36"/>
+    <p:sldId id="290" r:id="rId37"/>
+    <p:sldId id="291" r:id="rId38"/>
+    <p:sldId id="292" r:id="rId39"/>
+    <p:sldId id="293" r:id="rId40"/>
   </p:sldIdLst>
   <p:sldSz cx="9144000" cy="5143500" type="screen16x9"/>
   <p:notesSz cx="5143500" cy="9144000"/>
@@ -1179,7 +1180,7 @@
           <a:p>
             <a:fld id="{F7021451-1387-4CA6-816F-3879F97B5CBC}" type="slidenum">
               <a:rPr lang="en-US"/>
-              <a:t>19</a:t>
+              <a:t>20</a:t>
             </a:fld>
             <a:endParaRPr lang="en-US"/>
           </a:p>
@@ -1347,7 +1348,7 @@
           <a:p>
             <a:fld id="{F7021451-1387-4CA6-816F-3879F97B5CBC}" type="slidenum">
               <a:rPr lang="en-US"/>
-              <a:t>20</a:t>
+              <a:t>21</a:t>
             </a:fld>
             <a:endParaRPr lang="en-US"/>
           </a:p>
@@ -1431,7 +1432,7 @@
           <a:p>
             <a:fld id="{F7021451-1387-4CA6-816F-3879F97B5CBC}" type="slidenum">
               <a:rPr lang="en-US"/>
-              <a:t>21</a:t>
+              <a:t>22</a:t>
             </a:fld>
             <a:endParaRPr lang="en-US"/>
           </a:p>
@@ -1515,7 +1516,7 @@
           <a:p>
             <a:fld id="{F7021451-1387-4CA6-816F-3879F97B5CBC}" type="slidenum">
               <a:rPr lang="en-US"/>
-              <a:t>22</a:t>
+              <a:t>23</a:t>
             </a:fld>
             <a:endParaRPr lang="en-US"/>
           </a:p>
@@ -1599,7 +1600,7 @@
           <a:p>
             <a:fld id="{F7021451-1387-4CA6-816F-3879F97B5CBC}" type="slidenum">
               <a:rPr lang="en-US"/>
-              <a:t>23</a:t>
+              <a:t>24</a:t>
             </a:fld>
             <a:endParaRPr lang="en-US"/>
           </a:p>
@@ -1683,7 +1684,7 @@
           <a:p>
             <a:fld id="{F7021451-1387-4CA6-816F-3879F97B5CBC}" type="slidenum">
               <a:rPr lang="en-US"/>
-              <a:t>24</a:t>
+              <a:t>25</a:t>
             </a:fld>
             <a:endParaRPr lang="en-US"/>
           </a:p>
@@ -1767,7 +1768,7 @@
           <a:p>
             <a:fld id="{F7021451-1387-4CA6-816F-3879F97B5CBC}" type="slidenum">
               <a:rPr lang="en-US"/>
-              <a:t>25</a:t>
+              <a:t>26</a:t>
             </a:fld>
             <a:endParaRPr lang="en-US"/>
           </a:p>
@@ -1851,7 +1852,7 @@
           <a:p>
             <a:fld id="{F7021451-1387-4CA6-816F-3879F97B5CBC}" type="slidenum">
               <a:rPr lang="en-US"/>
-              <a:t>26</a:t>
+              <a:t>27</a:t>
             </a:fld>
             <a:endParaRPr lang="en-US"/>
           </a:p>
@@ -1935,7 +1936,7 @@
           <a:p>
             <a:fld id="{F7021451-1387-4CA6-816F-3879F97B5CBC}" type="slidenum">
               <a:rPr lang="en-US"/>
-              <a:t>27</a:t>
+              <a:t>28</a:t>
             </a:fld>
             <a:endParaRPr lang="en-US"/>
           </a:p>
@@ -2019,7 +2020,7 @@
           <a:p>
             <a:fld id="{F7021451-1387-4CA6-816F-3879F97B5CBC}" type="slidenum">
               <a:rPr lang="en-US"/>
-              <a:t>28</a:t>
+              <a:t>29</a:t>
             </a:fld>
             <a:endParaRPr lang="en-US"/>
           </a:p>
@@ -2103,7 +2104,7 @@
           <a:p>
             <a:fld id="{F7021451-1387-4CA6-816F-3879F97B5CBC}" type="slidenum">
               <a:rPr lang="en-US"/>
-              <a:t>29</a:t>
+              <a:t>30</a:t>
             </a:fld>
             <a:endParaRPr lang="en-US"/>
           </a:p>
@@ -2271,7 +2272,7 @@
           <a:p>
             <a:fld id="{F7021451-1387-4CA6-816F-3879F97B5CBC}" type="slidenum">
               <a:rPr lang="en-US"/>
-              <a:t>30</a:t>
+              <a:t>31</a:t>
             </a:fld>
             <a:endParaRPr lang="en-US"/>
           </a:p>
@@ -2355,7 +2356,7 @@
           <a:p>
             <a:fld id="{F7021451-1387-4CA6-816F-3879F97B5CBC}" type="slidenum">
               <a:rPr lang="en-US"/>
-              <a:t>31</a:t>
+              <a:t>32</a:t>
             </a:fld>
             <a:endParaRPr lang="en-US"/>
           </a:p>
@@ -2439,7 +2440,7 @@
           <a:p>
             <a:fld id="{F7021451-1387-4CA6-816F-3879F97B5CBC}" type="slidenum">
               <a:rPr lang="en-US"/>
-              <a:t>32</a:t>
+              <a:t>33</a:t>
             </a:fld>
             <a:endParaRPr lang="en-US"/>
           </a:p>
@@ -2523,7 +2524,7 @@
           <a:p>
             <a:fld id="{F7021451-1387-4CA6-816F-3879F97B5CBC}" type="slidenum">
               <a:rPr lang="en-US"/>
-              <a:t>33</a:t>
+              <a:t>34</a:t>
             </a:fld>
             <a:endParaRPr lang="en-US"/>
           </a:p>
@@ -2607,7 +2608,7 @@
           <a:p>
             <a:fld id="{F7021451-1387-4CA6-816F-3879F97B5CBC}" type="slidenum">
               <a:rPr lang="en-US"/>
-              <a:t>34</a:t>
+              <a:t>35</a:t>
             </a:fld>
             <a:endParaRPr lang="en-US"/>
           </a:p>
@@ -2691,7 +2692,7 @@
           <a:p>
             <a:fld id="{F7021451-1387-4CA6-816F-3879F97B5CBC}" type="slidenum">
               <a:rPr lang="en-US"/>
-              <a:t>35</a:t>
+              <a:t>36</a:t>
             </a:fld>
             <a:endParaRPr lang="en-US"/>
           </a:p>
@@ -2775,7 +2776,7 @@
           <a:p>
             <a:fld id="{F7021451-1387-4CA6-816F-3879F97B5CBC}" type="slidenum">
               <a:rPr lang="en-US"/>
-              <a:t>36</a:t>
+              <a:t>37</a:t>
             </a:fld>
             <a:endParaRPr lang="en-US"/>
           </a:p>
@@ -2859,7 +2860,7 @@
           <a:p>
             <a:fld id="{F7021451-1387-4CA6-816F-3879F97B5CBC}" type="slidenum">
               <a:rPr lang="en-US"/>
-              <a:t>37</a:t>
+              <a:t>38</a:t>
             </a:fld>
             <a:endParaRPr lang="en-US"/>
           </a:p>
@@ -2943,7 +2944,7 @@
           <a:p>
             <a:fld id="{F7021451-1387-4CA6-816F-3879F97B5CBC}" type="slidenum">
               <a:rPr lang="en-US"/>
-              <a:t>38</a:t>
+              <a:t>39</a:t>
             </a:fld>
             <a:endParaRPr lang="en-US"/>
           </a:p>
@@ -4212,13 +4213,7 @@
       </p:sp>
       <p:pic>
         <p:nvPicPr>
-          <p:cNvPr id="14" name="Image 13">
-            <a:extLst>
-              <a:ext uri="{FF2B5EF4-FFF2-40B4-BE49-F238E27FC236}">
-                <a16:creationId xmlns:a16="http://schemas.microsoft.com/office/drawing/2014/main" id="{A3942B2C-8D0B-9682-C1A6-7F26A48EE86E}"/>
-              </a:ext>
-            </a:extLst>
-          </p:cNvPr>
+          <p:cNvPr id="13" name="Picture 12" descr="logo-gp-badge.png"/>
           <p:cNvPicPr>
             <a:picLocks noChangeAspect="1"/>
           </p:cNvPicPr>
@@ -4232,8 +4227,8 @@
         </p:blipFill>
         <p:spPr>
           <a:xfrm>
-            <a:off x="7885365" y="3653790"/>
-            <a:ext cx="1287780" cy="1287780"/>
+            <a:off x="6400800" y="1051560"/>
+            <a:ext cx="2514600" cy="2514600"/>
           </a:xfrm>
           <a:prstGeom prst="rect">
             <a:avLst/>
@@ -4514,6 +4509,30 @@
           </a:p>
         </p:txBody>
       </p:sp>
+      <p:pic>
+        <p:nvPicPr>
+          <p:cNvPr id="9" name="Picture 8" descr="logo-gp-badge.png"/>
+          <p:cNvPicPr>
+            <a:picLocks noChangeAspect="1"/>
+          </p:cNvPicPr>
+          <p:nvPr/>
+        </p:nvPicPr>
+        <p:blipFill>
+          <a:blip r:embed="rId3"/>
+          <a:stretch>
+            <a:fillRect/>
+          </a:stretch>
+        </p:blipFill>
+        <p:spPr>
+          <a:xfrm>
+            <a:off x="8485632" y="146304"/>
+            <a:ext cx="502920" cy="502920"/>
+          </a:xfrm>
+          <a:prstGeom prst="rect">
+            <a:avLst/>
+          </a:prstGeom>
+        </p:spPr>
+      </p:pic>
     </p:spTree>
   </p:cSld>
   <p:clrMapOvr>
@@ -5262,6 +5281,30 @@
           </a:p>
         </p:txBody>
       </p:sp>
+      <p:pic>
+        <p:nvPicPr>
+          <p:cNvPr id="22" name="Picture 21" descr="logo-gp-badge.png"/>
+          <p:cNvPicPr>
+            <a:picLocks noChangeAspect="1"/>
+          </p:cNvPicPr>
+          <p:nvPr/>
+        </p:nvPicPr>
+        <p:blipFill>
+          <a:blip r:embed="rId3"/>
+          <a:stretch>
+            <a:fillRect/>
+          </a:stretch>
+        </p:blipFill>
+        <p:spPr>
+          <a:xfrm>
+            <a:off x="8485632" y="146304"/>
+            <a:ext cx="502920" cy="502920"/>
+          </a:xfrm>
+          <a:prstGeom prst="rect">
+            <a:avLst/>
+          </a:prstGeom>
+        </p:spPr>
+      </p:pic>
     </p:spTree>
   </p:cSld>
   <p:clrMapOvr>
@@ -5536,6 +5579,30 @@
           </a:p>
         </p:txBody>
       </p:sp>
+      <p:pic>
+        <p:nvPicPr>
+          <p:cNvPr id="9" name="Picture 8" descr="logo-gp-badge.png"/>
+          <p:cNvPicPr>
+            <a:picLocks noChangeAspect="1"/>
+          </p:cNvPicPr>
+          <p:nvPr/>
+        </p:nvPicPr>
+        <p:blipFill>
+          <a:blip r:embed="rId3"/>
+          <a:stretch>
+            <a:fillRect/>
+          </a:stretch>
+        </p:blipFill>
+        <p:spPr>
+          <a:xfrm>
+            <a:off x="8485632" y="146304"/>
+            <a:ext cx="502920" cy="502920"/>
+          </a:xfrm>
+          <a:prstGeom prst="rect">
+            <a:avLst/>
+          </a:prstGeom>
+        </p:spPr>
+      </p:pic>
     </p:spTree>
   </p:cSld>
   <p:clrMapOvr>
@@ -7006,6 +7073,30 @@
           </a:p>
         </p:txBody>
       </p:sp>
+      <p:pic>
+        <p:nvPicPr>
+          <p:cNvPr id="40" name="Picture 39" descr="logo-gp-badge.png"/>
+          <p:cNvPicPr>
+            <a:picLocks noChangeAspect="1"/>
+          </p:cNvPicPr>
+          <p:nvPr/>
+        </p:nvPicPr>
+        <p:blipFill>
+          <a:blip r:embed="rId3"/>
+          <a:stretch>
+            <a:fillRect/>
+          </a:stretch>
+        </p:blipFill>
+        <p:spPr>
+          <a:xfrm>
+            <a:off x="8485632" y="146304"/>
+            <a:ext cx="502920" cy="502920"/>
+          </a:xfrm>
+          <a:prstGeom prst="rect">
+            <a:avLst/>
+          </a:prstGeom>
+        </p:spPr>
+      </p:pic>
     </p:spTree>
   </p:cSld>
   <p:clrMapOvr>
@@ -7754,6 +7845,30 @@
           </a:p>
         </p:txBody>
       </p:sp>
+      <p:pic>
+        <p:nvPicPr>
+          <p:cNvPr id="22" name="Picture 21" descr="logo-gp-badge.png"/>
+          <p:cNvPicPr>
+            <a:picLocks noChangeAspect="1"/>
+          </p:cNvPicPr>
+          <p:nvPr/>
+        </p:nvPicPr>
+        <p:blipFill>
+          <a:blip r:embed="rId3"/>
+          <a:stretch>
+            <a:fillRect/>
+          </a:stretch>
+        </p:blipFill>
+        <p:spPr>
+          <a:xfrm>
+            <a:off x="8485632" y="146304"/>
+            <a:ext cx="502920" cy="502920"/>
+          </a:xfrm>
+          <a:prstGeom prst="rect">
+            <a:avLst/>
+          </a:prstGeom>
+        </p:spPr>
+      </p:pic>
     </p:spTree>
   </p:cSld>
   <p:clrMapOvr>
@@ -8028,6 +8143,30 @@
           </a:p>
         </p:txBody>
       </p:sp>
+      <p:pic>
+        <p:nvPicPr>
+          <p:cNvPr id="9" name="Picture 8" descr="logo-gp-badge.png"/>
+          <p:cNvPicPr>
+            <a:picLocks noChangeAspect="1"/>
+          </p:cNvPicPr>
+          <p:nvPr/>
+        </p:nvPicPr>
+        <p:blipFill>
+          <a:blip r:embed="rId3"/>
+          <a:stretch>
+            <a:fillRect/>
+          </a:stretch>
+        </p:blipFill>
+        <p:spPr>
+          <a:xfrm>
+            <a:off x="8485632" y="146304"/>
+            <a:ext cx="502920" cy="502920"/>
+          </a:xfrm>
+          <a:prstGeom prst="rect">
+            <a:avLst/>
+          </a:prstGeom>
+        </p:spPr>
+      </p:pic>
     </p:spTree>
   </p:cSld>
   <p:clrMapOvr>
@@ -8776,6 +8915,30 @@
           </a:p>
         </p:txBody>
       </p:sp>
+      <p:pic>
+        <p:nvPicPr>
+          <p:cNvPr id="22" name="Picture 21" descr="logo-gp-badge.png"/>
+          <p:cNvPicPr>
+            <a:picLocks noChangeAspect="1"/>
+          </p:cNvPicPr>
+          <p:nvPr/>
+        </p:nvPicPr>
+        <p:blipFill>
+          <a:blip r:embed="rId3"/>
+          <a:stretch>
+            <a:fillRect/>
+          </a:stretch>
+        </p:blipFill>
+        <p:spPr>
+          <a:xfrm>
+            <a:off x="8485632" y="146304"/>
+            <a:ext cx="502920" cy="502920"/>
+          </a:xfrm>
+          <a:prstGeom prst="rect">
+            <a:avLst/>
+          </a:prstGeom>
+        </p:spPr>
+      </p:pic>
     </p:spTree>
   </p:cSld>
   <p:clrMapOvr>
@@ -9050,6 +9213,30 @@
           </a:p>
         </p:txBody>
       </p:sp>
+      <p:pic>
+        <p:nvPicPr>
+          <p:cNvPr id="9" name="Picture 8" descr="logo-gp-badge.png"/>
+          <p:cNvPicPr>
+            <a:picLocks noChangeAspect="1"/>
+          </p:cNvPicPr>
+          <p:nvPr/>
+        </p:nvPicPr>
+        <p:blipFill>
+          <a:blip r:embed="rId3"/>
+          <a:stretch>
+            <a:fillRect/>
+          </a:stretch>
+        </p:blipFill>
+        <p:spPr>
+          <a:xfrm>
+            <a:off x="8485632" y="146304"/>
+            <a:ext cx="502920" cy="502920"/>
+          </a:xfrm>
+          <a:prstGeom prst="rect">
+            <a:avLst/>
+          </a:prstGeom>
+        </p:spPr>
+      </p:pic>
     </p:spTree>
   </p:cSld>
   <p:clrMapOvr>
@@ -9798,6 +9985,30 @@
           </a:p>
         </p:txBody>
       </p:sp>
+      <p:pic>
+        <p:nvPicPr>
+          <p:cNvPr id="22" name="Picture 21" descr="logo-gp-badge.png"/>
+          <p:cNvPicPr>
+            <a:picLocks noChangeAspect="1"/>
+          </p:cNvPicPr>
+          <p:nvPr/>
+        </p:nvPicPr>
+        <p:blipFill>
+          <a:blip r:embed="rId3"/>
+          <a:stretch>
+            <a:fillRect/>
+          </a:stretch>
+        </p:blipFill>
+        <p:spPr>
+          <a:xfrm>
+            <a:off x="8485632" y="146304"/>
+            <a:ext cx="502920" cy="502920"/>
+          </a:xfrm>
+          <a:prstGeom prst="rect">
+            <a:avLst/>
+          </a:prstGeom>
+        </p:spPr>
+      </p:pic>
     </p:spTree>
   </p:cSld>
   <p:clrMapOvr>
@@ -9808,7 +10019,7 @@
 
 <file path=ppt/slides/slide19.xml><?xml version="1.0" encoding="utf-8"?>
 <p:sld xmlns:a="http://schemas.openxmlformats.org/drawingml/2006/main" xmlns:r="http://schemas.openxmlformats.org/officeDocument/2006/relationships" xmlns:p="http://schemas.openxmlformats.org/presentationml/2006/main">
-  <p:cSld name="Slide 19">
+  <p:cSld>
     <p:spTree>
       <p:nvGrpSpPr>
         <p:cNvPr id="1" name=""/>
@@ -9825,7 +10036,7 @@
       </p:grpSpPr>
       <p:sp>
         <p:nvSpPr>
-          <p:cNvPr id="2" name="Shape 0"/>
+          <p:cNvPr id="2" name="Rectangle 1"/>
           <p:cNvSpPr/>
           <p:nvPr/>
         </p:nvSpPr>
@@ -9838,26 +10049,39 @@
             <a:avLst/>
           </a:prstGeom>
           <a:solidFill>
-            <a:srgbClr val="0D1F3C"/>
-          </a:solidFill>
-          <a:ln w="12700">
-            <a:solidFill>
-              <a:srgbClr val="0D1F3C"/>
-            </a:solidFill>
-            <a:prstDash val="solid"/>
+            <a:srgbClr val="F8FAFC"/>
+          </a:solidFill>
+          <a:ln>
+            <a:noFill/>
           </a:ln>
-        </p:spPr>
-        <p:txBody>
-          <a:bodyPr/>
-          <a:lstStyle/>
-          <a:p>
-            <a:endParaRPr lang="fr-SN"/>
-          </a:p>
-        </p:txBody>
-      </p:sp>
-      <p:sp>
-        <p:nvSpPr>
-          <p:cNvPr id="3" name="Shape 1"/>
+          <a:effectLst/>
+        </p:spPr>
+        <p:style>
+          <a:lnRef idx="1">
+            <a:schemeClr val="accent1"/>
+          </a:lnRef>
+          <a:fillRef idx="3">
+            <a:schemeClr val="accent1"/>
+          </a:fillRef>
+          <a:effectRef idx="2">
+            <a:schemeClr val="accent1"/>
+          </a:effectRef>
+          <a:fontRef idx="minor">
+            <a:schemeClr val="lt1"/>
+          </a:fontRef>
+        </p:style>
+        <p:txBody>
+          <a:bodyPr rtlCol="0" anchor="ctr"/>
+          <a:lstStyle/>
+          <a:p>
+            <a:pPr algn="ctr"/>
+            <a:endParaRPr/>
+          </a:p>
+        </p:txBody>
+      </p:sp>
+      <p:sp>
+        <p:nvSpPr>
+          <p:cNvPr id="3" name="Rectangle 2"/>
           <p:cNvSpPr/>
           <p:nvPr/>
         </p:nvSpPr>
@@ -9870,173 +10094,1330 @@
             <a:avLst/>
           </a:prstGeom>
           <a:solidFill>
-            <a:srgbClr val="F59E0B"/>
-          </a:solidFill>
-          <a:ln w="12700">
-            <a:solidFill>
-              <a:srgbClr val="F59E0B"/>
-            </a:solidFill>
-            <a:prstDash val="solid"/>
+            <a:srgbClr val="1B3A6B"/>
+          </a:solidFill>
+          <a:ln>
+            <a:noFill/>
           </a:ln>
-        </p:spPr>
-        <p:txBody>
-          <a:bodyPr/>
-          <a:lstStyle/>
-          <a:p>
-            <a:endParaRPr lang="fr-SN"/>
-          </a:p>
-        </p:txBody>
-      </p:sp>
-      <p:sp>
-        <p:nvSpPr>
-          <p:cNvPr id="4" name="Shape 2"/>
-          <p:cNvSpPr/>
-          <p:nvPr/>
-        </p:nvSpPr>
-        <p:spPr>
-          <a:xfrm>
-            <a:off x="1005840" y="1280160"/>
-            <a:ext cx="1463040" cy="1463040"/>
-          </a:xfrm>
-          <a:prstGeom prst="ellipse">
-            <a:avLst/>
-          </a:prstGeom>
-          <a:solidFill>
-            <a:srgbClr val="1B3A6B"/>
-          </a:solidFill>
-          <a:ln w="25400">
+          <a:effectLst/>
+        </p:spPr>
+        <p:style>
+          <a:lnRef idx="1">
+            <a:schemeClr val="accent1"/>
+          </a:lnRef>
+          <a:fillRef idx="3">
+            <a:schemeClr val="accent1"/>
+          </a:fillRef>
+          <a:effectRef idx="2">
+            <a:schemeClr val="accent1"/>
+          </a:effectRef>
+          <a:fontRef idx="minor">
+            <a:schemeClr val="lt1"/>
+          </a:fontRef>
+        </p:style>
+        <p:txBody>
+          <a:bodyPr rtlCol="0" anchor="ctr"/>
+          <a:lstStyle/>
+          <a:p>
+            <a:pPr algn="ctr"/>
+            <a:endParaRPr/>
+          </a:p>
+        </p:txBody>
+      </p:sp>
+      <p:sp>
+        <p:nvSpPr>
+          <p:cNvPr id="4" name="TextBox 3"/>
+          <p:cNvSpPr txBox="1"/>
+          <p:nvPr/>
+        </p:nvSpPr>
+        <p:spPr>
+          <a:xfrm>
+            <a:off x="548640" y="219456"/>
+            <a:ext cx="7680960" cy="310896"/>
+          </a:xfrm>
+          <a:prstGeom prst="rect">
+            <a:avLst/>
+          </a:prstGeom>
+          <a:noFill/>
+        </p:spPr>
+        <p:txBody>
+          <a:bodyPr wrap="square" lIns="0" tIns="0" rIns="0" bIns="0" anchor="t">
+            <a:spAutoFit/>
+          </a:bodyPr>
+          <a:lstStyle/>
+          <a:p>
+            <a:pPr algn="l"/>
+            <a:r>
+              <a:rPr sz="1100" b="1" i="0">
+                <a:solidFill>
+                  <a:srgbClr val="F59E0B"/>
+                </a:solidFill>
+                <a:latin typeface="Trebuchet MS"/>
+              </a:rPr>
+              <a:t>WORKFLOW DE VALIDATION</a:t>
+            </a:r>
+          </a:p>
+        </p:txBody>
+      </p:sp>
+      <p:sp>
+        <p:nvSpPr>
+          <p:cNvPr id="5" name="TextBox 4"/>
+          <p:cNvSpPr txBox="1"/>
+          <p:nvPr/>
+        </p:nvSpPr>
+        <p:spPr>
+          <a:xfrm>
+            <a:off x="548640" y="566928"/>
+            <a:ext cx="7863840" cy="457200"/>
+          </a:xfrm>
+          <a:prstGeom prst="rect">
+            <a:avLst/>
+          </a:prstGeom>
+          <a:noFill/>
+        </p:spPr>
+        <p:txBody>
+          <a:bodyPr wrap="square" lIns="0" tIns="0" rIns="0" bIns="0" anchor="t">
+            <a:spAutoFit/>
+          </a:bodyPr>
+          <a:lstStyle/>
+          <a:p>
+            <a:pPr algn="l"/>
+            <a:r>
+              <a:rPr sz="2000" b="1" i="0">
+                <a:solidFill>
+                  <a:srgbClr val="0F172A"/>
+                </a:solidFill>
+                <a:latin typeface="Trebuchet MS"/>
+              </a:rPr>
+              <a:t>Cycle de validation d'une réunion ou d'une mission</a:t>
+            </a:r>
+          </a:p>
+        </p:txBody>
+      </p:sp>
+      <p:sp>
+        <p:nvSpPr>
+          <p:cNvPr id="6" name="Rounded Rectangle 5"/>
+          <p:cNvSpPr/>
+          <p:nvPr/>
+        </p:nvSpPr>
+        <p:spPr>
+          <a:xfrm>
+            <a:off x="365760" y="1737360"/>
+            <a:ext cx="1371600" cy="1371600"/>
+          </a:xfrm>
+          <a:prstGeom prst="roundRect">
+            <a:avLst/>
+          </a:prstGeom>
+          <a:solidFill>
+            <a:srgbClr val="FFFFFF"/>
+          </a:solidFill>
+          <a:ln w="19050">
             <a:solidFill>
               <a:srgbClr val="2563EB"/>
             </a:solidFill>
-            <a:prstDash val="solid"/>
           </a:ln>
-        </p:spPr>
-        <p:txBody>
-          <a:bodyPr/>
-          <a:lstStyle/>
-          <a:p>
-            <a:endParaRPr lang="fr-SN"/>
-          </a:p>
-        </p:txBody>
-      </p:sp>
-      <p:sp>
-        <p:nvSpPr>
-          <p:cNvPr id="5" name="Text 3"/>
-          <p:cNvSpPr/>
-          <p:nvPr/>
-        </p:nvSpPr>
-        <p:spPr>
-          <a:xfrm>
-            <a:off x="1005840" y="1280160"/>
-            <a:ext cx="1463040" cy="1463040"/>
-          </a:xfrm>
-          <a:prstGeom prst="rect">
-            <a:avLst/>
-          </a:prstGeom>
-          <a:noFill/>
-          <a:ln/>
-        </p:spPr>
-        <p:txBody>
-          <a:bodyPr wrap="square" lIns="0" tIns="0" rIns="0" bIns="0" rtlCol="0" anchor="ctr"/>
-          <a:lstStyle/>
-          <a:p>
-            <a:pPr marL="0" indent="0" algn="ctr">
-              <a:buNone/>
-            </a:pPr>
-            <a:r>
-              <a:rPr lang="en-US" sz="4000" dirty="0">
-                <a:solidFill>
-                  <a:srgbClr val="000000"/>
-                </a:solidFill>
-              </a:rPr>
-              <a:t>🏢</a:t>
-            </a:r>
-            <a:endParaRPr lang="en-US" sz="4000" dirty="0"/>
-          </a:p>
-        </p:txBody>
-      </p:sp>
-      <p:sp>
-        <p:nvSpPr>
-          <p:cNvPr id="6" name="Text 4"/>
-          <p:cNvSpPr/>
-          <p:nvPr/>
-        </p:nvSpPr>
-        <p:spPr>
-          <a:xfrm>
-            <a:off x="2743200" y="1463040"/>
-            <a:ext cx="5943600" cy="777240"/>
-          </a:xfrm>
-          <a:prstGeom prst="rect">
-            <a:avLst/>
-          </a:prstGeom>
-          <a:noFill/>
-          <a:ln/>
-        </p:spPr>
-        <p:txBody>
-          <a:bodyPr wrap="square" lIns="0" tIns="0" rIns="0" bIns="0" rtlCol="0" anchor="ctr"/>
-          <a:lstStyle/>
-          <a:p>
-            <a:pPr marL="0" indent="0">
-              <a:buNone/>
-            </a:pPr>
-            <a:r>
-              <a:rPr lang="en-US" sz="3800" b="1" dirty="0">
+          <a:effectLst/>
+        </p:spPr>
+        <p:style>
+          <a:lnRef idx="1">
+            <a:schemeClr val="accent1"/>
+          </a:lnRef>
+          <a:fillRef idx="3">
+            <a:schemeClr val="accent1"/>
+          </a:fillRef>
+          <a:effectRef idx="2">
+            <a:schemeClr val="accent1"/>
+          </a:effectRef>
+          <a:fontRef idx="minor">
+            <a:schemeClr val="lt1"/>
+          </a:fontRef>
+        </p:style>
+        <p:txBody>
+          <a:bodyPr rtlCol="0" anchor="ctr"/>
+          <a:lstStyle/>
+          <a:p>
+            <a:pPr algn="ctr"/>
+            <a:endParaRPr/>
+          </a:p>
+        </p:txBody>
+      </p:sp>
+      <p:sp>
+        <p:nvSpPr>
+          <p:cNvPr id="7" name="Rectangle 6"/>
+          <p:cNvSpPr/>
+          <p:nvPr/>
+        </p:nvSpPr>
+        <p:spPr>
+          <a:xfrm>
+            <a:off x="365760" y="1737360"/>
+            <a:ext cx="1371600" cy="274320"/>
+          </a:xfrm>
+          <a:prstGeom prst="rect">
+            <a:avLst/>
+          </a:prstGeom>
+          <a:solidFill>
+            <a:srgbClr val="2563EB"/>
+          </a:solidFill>
+          <a:ln>
+            <a:noFill/>
+          </a:ln>
+          <a:effectLst/>
+        </p:spPr>
+        <p:style>
+          <a:lnRef idx="1">
+            <a:schemeClr val="accent1"/>
+          </a:lnRef>
+          <a:fillRef idx="3">
+            <a:schemeClr val="accent1"/>
+          </a:fillRef>
+          <a:effectRef idx="2">
+            <a:schemeClr val="accent1"/>
+          </a:effectRef>
+          <a:fontRef idx="minor">
+            <a:schemeClr val="lt1"/>
+          </a:fontRef>
+        </p:style>
+        <p:txBody>
+          <a:bodyPr rtlCol="0" anchor="ctr"/>
+          <a:lstStyle/>
+          <a:p>
+            <a:pPr algn="ctr"/>
+            <a:endParaRPr/>
+          </a:p>
+        </p:txBody>
+      </p:sp>
+      <p:sp>
+        <p:nvSpPr>
+          <p:cNvPr id="8" name="TextBox 7"/>
+          <p:cNvSpPr txBox="1"/>
+          <p:nvPr/>
+        </p:nvSpPr>
+        <p:spPr>
+          <a:xfrm>
+            <a:off x="420624" y="2121408"/>
+            <a:ext cx="1261872" cy="932688"/>
+          </a:xfrm>
+          <a:prstGeom prst="rect">
+            <a:avLst/>
+          </a:prstGeom>
+          <a:noFill/>
+        </p:spPr>
+        <p:txBody>
+          <a:bodyPr wrap="square" lIns="0" tIns="0" rIns="0" bIns="0" anchor="t">
+            <a:spAutoFit/>
+          </a:bodyPr>
+          <a:lstStyle/>
+          <a:p>
+            <a:pPr algn="ctr">
+              <a:lnSpc>
+                <a:spcPct val="100000"/>
+              </a:lnSpc>
+            </a:pPr>
+            <a:r>
+              <a:rPr sz="1250" b="1" i="0">
+                <a:solidFill>
+                  <a:srgbClr val="2563EB"/>
+                </a:solidFill>
+                <a:latin typeface="Trebuchet MS"/>
+              </a:rPr>
+              <a:t>RESPONSABLE</a:t>
+            </a:r>
+          </a:p>
+          <a:p>
+            <a:pPr algn="ctr">
+              <a:lnSpc>
+                <a:spcPct val="100000"/>
+              </a:lnSpc>
+            </a:pPr>
+            <a:r>
+              <a:rPr sz="1100" b="0" i="0">
+                <a:solidFill>
+                  <a:srgbClr val="334155"/>
+                </a:solidFill>
+                <a:latin typeface="Trebuchet MS"/>
+              </a:rPr>
+              <a:t>crée la réunion / la mission</a:t>
+            </a:r>
+          </a:p>
+        </p:txBody>
+      </p:sp>
+      <p:sp>
+        <p:nvSpPr>
+          <p:cNvPr id="9" name="TextBox 8"/>
+          <p:cNvSpPr txBox="1"/>
+          <p:nvPr/>
+        </p:nvSpPr>
+        <p:spPr>
+          <a:xfrm>
+            <a:off x="1700784" y="2221991"/>
+            <a:ext cx="365760" cy="402336"/>
+          </a:xfrm>
+          <a:prstGeom prst="rect">
+            <a:avLst/>
+          </a:prstGeom>
+          <a:noFill/>
+        </p:spPr>
+        <p:txBody>
+          <a:bodyPr wrap="square" lIns="0" tIns="0" rIns="0" bIns="0" anchor="ctr">
+            <a:spAutoFit/>
+          </a:bodyPr>
+          <a:lstStyle/>
+          <a:p>
+            <a:pPr algn="ctr"/>
+            <a:r>
+              <a:rPr sz="2200" b="0" i="0">
+                <a:solidFill>
+                  <a:srgbClr val="F59E0B"/>
+                </a:solidFill>
+                <a:latin typeface="Calibri"/>
+              </a:rPr>
+              <a:t>→</a:t>
+            </a:r>
+          </a:p>
+        </p:txBody>
+      </p:sp>
+      <p:sp>
+        <p:nvSpPr>
+          <p:cNvPr id="10" name="Diamond 9"/>
+          <p:cNvSpPr/>
+          <p:nvPr/>
+        </p:nvSpPr>
+        <p:spPr>
+          <a:xfrm>
+            <a:off x="2057400" y="1783080"/>
+            <a:ext cx="1417320" cy="1280160"/>
+          </a:xfrm>
+          <a:prstGeom prst="diamond">
+            <a:avLst/>
+          </a:prstGeom>
+          <a:solidFill>
+            <a:srgbClr val="F59E0B"/>
+          </a:solidFill>
+          <a:ln w="19050">
+            <a:solidFill>
+              <a:srgbClr val="D97706"/>
+            </a:solidFill>
+          </a:ln>
+          <a:effectLst/>
+        </p:spPr>
+        <p:style>
+          <a:lnRef idx="1">
+            <a:schemeClr val="accent1"/>
+          </a:lnRef>
+          <a:fillRef idx="3">
+            <a:schemeClr val="accent1"/>
+          </a:fillRef>
+          <a:effectRef idx="2">
+            <a:schemeClr val="accent1"/>
+          </a:effectRef>
+          <a:fontRef idx="minor">
+            <a:schemeClr val="lt1"/>
+          </a:fontRef>
+        </p:style>
+        <p:txBody>
+          <a:bodyPr rtlCol="0" anchor="ctr"/>
+          <a:lstStyle/>
+          <a:p>
+            <a:pPr algn="ctr"/>
+            <a:endParaRPr/>
+          </a:p>
+        </p:txBody>
+      </p:sp>
+      <p:sp>
+        <p:nvSpPr>
+          <p:cNvPr id="11" name="TextBox 10"/>
+          <p:cNvSpPr txBox="1"/>
+          <p:nvPr/>
+        </p:nvSpPr>
+        <p:spPr>
+          <a:xfrm>
+            <a:off x="2103120" y="1993392"/>
+            <a:ext cx="1325880" cy="868680"/>
+          </a:xfrm>
+          <a:prstGeom prst="rect">
+            <a:avLst/>
+          </a:prstGeom>
+          <a:noFill/>
+        </p:spPr>
+        <p:txBody>
+          <a:bodyPr wrap="square" lIns="0" tIns="0" rIns="0" bIns="0" anchor="ctr">
+            <a:spAutoFit/>
+          </a:bodyPr>
+          <a:lstStyle/>
+          <a:p>
+            <a:pPr algn="ctr">
+              <a:lnSpc>
+                <a:spcPct val="100000"/>
+              </a:lnSpc>
+            </a:pPr>
+            <a:r>
+              <a:rPr sz="1100" b="1" i="0">
                 <a:solidFill>
                   <a:srgbClr val="FFFFFF"/>
                 </a:solidFill>
-                <a:latin typeface="Trebuchet MS" pitchFamily="34" charset="0"/>
-                <a:ea typeface="Trebuchet MS" pitchFamily="34" charset="-122"/>
-                <a:cs typeface="Trebuchet MS" pitchFamily="34" charset="-120"/>
-              </a:rPr>
-              <a:t>Salles de Réunion</a:t>
-            </a:r>
-            <a:endParaRPr lang="en-US" sz="3800" dirty="0"/>
-          </a:p>
-        </p:txBody>
-      </p:sp>
-      <p:sp>
-        <p:nvSpPr>
-          <p:cNvPr id="7" name="Text 5"/>
-          <p:cNvSpPr/>
-          <p:nvPr/>
-        </p:nvSpPr>
-        <p:spPr>
-          <a:xfrm>
-            <a:off x="2743200" y="2331720"/>
-            <a:ext cx="5943600" cy="640080"/>
-          </a:xfrm>
-          <a:prstGeom prst="rect">
-            <a:avLst/>
-          </a:prstGeom>
-          <a:noFill/>
-          <a:ln/>
-        </p:spPr>
-        <p:txBody>
-          <a:bodyPr wrap="square" lIns="0" tIns="0" rIns="0" bIns="0" rtlCol="0" anchor="t"/>
-          <a:lstStyle/>
-          <a:p>
-            <a:pPr marL="0" indent="0">
-              <a:buNone/>
-            </a:pPr>
-            <a:r>
-              <a:rPr lang="en-US" sz="1800" dirty="0">
-                <a:solidFill>
-                  <a:srgbClr val="94A3B8"/>
-                </a:solidFill>
-                <a:latin typeface="Calibri" pitchFamily="34" charset="0"/>
-                <a:ea typeface="Calibri" pitchFamily="34" charset="-122"/>
-                <a:cs typeface="Calibri" pitchFamily="34" charset="-120"/>
-              </a:rPr>
-              <a:t>Gestion et occupation en temps réel</a:t>
-            </a:r>
-            <a:endParaRPr lang="en-US" sz="1800" dirty="0"/>
-          </a:p>
-        </p:txBody>
-      </p:sp>
-      <p:sp>
-        <p:nvSpPr>
-          <p:cNvPr id="8" name="Text 6"/>
-          <p:cNvSpPr/>
+                <a:latin typeface="Trebuchet MS"/>
+              </a:rPr>
+              <a:t>Coordinateur</a:t>
+            </a:r>
+          </a:p>
+          <a:p>
+            <a:pPr algn="ctr">
+              <a:lnSpc>
+                <a:spcPct val="100000"/>
+              </a:lnSpc>
+            </a:pPr>
+            <a:r>
+              <a:rPr sz="1100" b="1" i="0">
+                <a:solidFill>
+                  <a:srgbClr val="FFFFFF"/>
+                </a:solidFill>
+                <a:latin typeface="Trebuchet MS"/>
+              </a:rPr>
+              <a:t>projet ?</a:t>
+            </a:r>
+          </a:p>
+        </p:txBody>
+      </p:sp>
+      <p:sp>
+        <p:nvSpPr>
+          <p:cNvPr id="12" name="TextBox 11"/>
+          <p:cNvSpPr txBox="1"/>
+          <p:nvPr/>
+        </p:nvSpPr>
+        <p:spPr>
+          <a:xfrm>
+            <a:off x="3456432" y="1417320"/>
+            <a:ext cx="502920" cy="274320"/>
+          </a:xfrm>
+          <a:prstGeom prst="rect">
+            <a:avLst/>
+          </a:prstGeom>
+          <a:noFill/>
+        </p:spPr>
+        <p:txBody>
+          <a:bodyPr wrap="square" lIns="0" tIns="0" rIns="0" bIns="0" anchor="t">
+            <a:spAutoFit/>
+          </a:bodyPr>
+          <a:lstStyle/>
+          <a:p>
+            <a:pPr algn="ctr"/>
+            <a:r>
+              <a:rPr sz="1000" b="1" i="0">
+                <a:solidFill>
+                  <a:srgbClr val="059669"/>
+                </a:solidFill>
+                <a:latin typeface="Calibri"/>
+              </a:rPr>
+              <a:t>oui</a:t>
+            </a:r>
+          </a:p>
+        </p:txBody>
+      </p:sp>
+      <p:sp>
+        <p:nvSpPr>
+          <p:cNvPr id="13" name="TextBox 12"/>
+          <p:cNvSpPr txBox="1"/>
+          <p:nvPr/>
+        </p:nvSpPr>
+        <p:spPr>
+          <a:xfrm>
+            <a:off x="3419856" y="1783080"/>
+            <a:ext cx="411480" cy="365760"/>
+          </a:xfrm>
+          <a:prstGeom prst="rect">
+            <a:avLst/>
+          </a:prstGeom>
+          <a:noFill/>
+        </p:spPr>
+        <p:txBody>
+          <a:bodyPr wrap="square" lIns="0" tIns="0" rIns="0" bIns="0" anchor="ctr">
+            <a:spAutoFit/>
+          </a:bodyPr>
+          <a:lstStyle/>
+          <a:p>
+            <a:pPr algn="ctr"/>
+            <a:r>
+              <a:rPr sz="1800" b="0" i="0">
+                <a:solidFill>
+                  <a:srgbClr val="D97706"/>
+                </a:solidFill>
+                <a:latin typeface="Calibri"/>
+              </a:rPr>
+              <a:t>↗</a:t>
+            </a:r>
+          </a:p>
+        </p:txBody>
+      </p:sp>
+      <p:sp>
+        <p:nvSpPr>
+          <p:cNvPr id="14" name="TextBox 13"/>
+          <p:cNvSpPr txBox="1"/>
+          <p:nvPr/>
+        </p:nvSpPr>
+        <p:spPr>
+          <a:xfrm>
+            <a:off x="3456432" y="3246120"/>
+            <a:ext cx="502920" cy="274320"/>
+          </a:xfrm>
+          <a:prstGeom prst="rect">
+            <a:avLst/>
+          </a:prstGeom>
+          <a:noFill/>
+        </p:spPr>
+        <p:txBody>
+          <a:bodyPr wrap="square" lIns="0" tIns="0" rIns="0" bIns="0" anchor="t">
+            <a:spAutoFit/>
+          </a:bodyPr>
+          <a:lstStyle/>
+          <a:p>
+            <a:pPr algn="ctr"/>
+            <a:r>
+              <a:rPr sz="1000" b="1" i="0">
+                <a:solidFill>
+                  <a:srgbClr val="2563EB"/>
+                </a:solidFill>
+                <a:latin typeface="Calibri"/>
+              </a:rPr>
+              <a:t>non</a:t>
+            </a:r>
+          </a:p>
+        </p:txBody>
+      </p:sp>
+      <p:sp>
+        <p:nvSpPr>
+          <p:cNvPr id="15" name="TextBox 14"/>
+          <p:cNvSpPr txBox="1"/>
+          <p:nvPr/>
+        </p:nvSpPr>
+        <p:spPr>
+          <a:xfrm>
+            <a:off x="3419856" y="2697480"/>
+            <a:ext cx="411480" cy="365760"/>
+          </a:xfrm>
+          <a:prstGeom prst="rect">
+            <a:avLst/>
+          </a:prstGeom>
+          <a:noFill/>
+        </p:spPr>
+        <p:txBody>
+          <a:bodyPr wrap="square" lIns="0" tIns="0" rIns="0" bIns="0" anchor="ctr">
+            <a:spAutoFit/>
+          </a:bodyPr>
+          <a:lstStyle/>
+          <a:p>
+            <a:pPr algn="ctr"/>
+            <a:r>
+              <a:rPr sz="1800" b="0" i="0">
+                <a:solidFill>
+                  <a:srgbClr val="D97706"/>
+                </a:solidFill>
+                <a:latin typeface="Calibri"/>
+              </a:rPr>
+              <a:t>↘</a:t>
+            </a:r>
+          </a:p>
+        </p:txBody>
+      </p:sp>
+      <p:sp>
+        <p:nvSpPr>
+          <p:cNvPr id="16" name="Rounded Rectangle 15"/>
+          <p:cNvSpPr/>
+          <p:nvPr/>
+        </p:nvSpPr>
+        <p:spPr>
+          <a:xfrm>
+            <a:off x="3749039" y="1325880"/>
+            <a:ext cx="1645920" cy="877824"/>
+          </a:xfrm>
+          <a:prstGeom prst="roundRect">
+            <a:avLst/>
+          </a:prstGeom>
+          <a:solidFill>
+            <a:srgbClr val="FFFFFF"/>
+          </a:solidFill>
+          <a:ln w="19050">
+            <a:solidFill>
+              <a:srgbClr val="64748B"/>
+            </a:solidFill>
+          </a:ln>
+          <a:effectLst/>
+        </p:spPr>
+        <p:style>
+          <a:lnRef idx="1">
+            <a:schemeClr val="accent1"/>
+          </a:lnRef>
+          <a:fillRef idx="3">
+            <a:schemeClr val="accent1"/>
+          </a:fillRef>
+          <a:effectRef idx="2">
+            <a:schemeClr val="accent1"/>
+          </a:effectRef>
+          <a:fontRef idx="minor">
+            <a:schemeClr val="lt1"/>
+          </a:fontRef>
+        </p:style>
+        <p:txBody>
+          <a:bodyPr rtlCol="0" anchor="ctr"/>
+          <a:lstStyle/>
+          <a:p>
+            <a:pPr algn="ctr"/>
+            <a:endParaRPr/>
+          </a:p>
+        </p:txBody>
+      </p:sp>
+      <p:sp>
+        <p:nvSpPr>
+          <p:cNvPr id="17" name="TextBox 16"/>
+          <p:cNvSpPr txBox="1"/>
+          <p:nvPr/>
+        </p:nvSpPr>
+        <p:spPr>
+          <a:xfrm>
+            <a:off x="3803903" y="1399032"/>
+            <a:ext cx="1536192" cy="768096"/>
+          </a:xfrm>
+          <a:prstGeom prst="rect">
+            <a:avLst/>
+          </a:prstGeom>
+          <a:noFill/>
+        </p:spPr>
+        <p:txBody>
+          <a:bodyPr wrap="square" lIns="0" tIns="0" rIns="0" bIns="0" anchor="ctr">
+            <a:spAutoFit/>
+          </a:bodyPr>
+          <a:lstStyle/>
+          <a:p>
+            <a:pPr algn="ctr">
+              <a:lnSpc>
+                <a:spcPct val="100000"/>
+              </a:lnSpc>
+            </a:pPr>
+            <a:r>
+              <a:rPr sz="1150" b="1" i="0">
+                <a:solidFill>
+                  <a:srgbClr val="64748B"/>
+                </a:solidFill>
+                <a:latin typeface="Trebuchet MS"/>
+              </a:rPr>
+              <a:t>DRAFT  ·  Étape 1</a:t>
+            </a:r>
+          </a:p>
+          <a:p>
+            <a:pPr algn="ctr">
+              <a:lnSpc>
+                <a:spcPct val="100000"/>
+              </a:lnSpc>
+            </a:pPr>
+            <a:r>
+              <a:rPr sz="950" b="0" i="0">
+                <a:solidFill>
+                  <a:srgbClr val="64748B"/>
+                </a:solidFill>
+                <a:latin typeface="Trebuchet MS"/>
+              </a:rPr>
+              <a:t>Responsable</a:t>
+            </a:r>
+          </a:p>
+          <a:p>
+            <a:pPr algn="ctr">
+              <a:lnSpc>
+                <a:spcPct val="100000"/>
+              </a:lnSpc>
+            </a:pPr>
+            <a:r>
+              <a:rPr sz="900" b="0" i="1">
+                <a:solidFill>
+                  <a:srgbClr val="D97706"/>
+                </a:solidFill>
+                <a:latin typeface="Trebuchet MS"/>
+              </a:rPr>
+              <a:t>→ approve-coordinator</a:t>
+            </a:r>
+          </a:p>
+        </p:txBody>
+      </p:sp>
+      <p:sp>
+        <p:nvSpPr>
+          <p:cNvPr id="18" name="Rounded Rectangle 17"/>
+          <p:cNvSpPr/>
+          <p:nvPr/>
+        </p:nvSpPr>
+        <p:spPr>
+          <a:xfrm>
+            <a:off x="3749039" y="2651760"/>
+            <a:ext cx="1645920" cy="877824"/>
+          </a:xfrm>
+          <a:prstGeom prst="roundRect">
+            <a:avLst/>
+          </a:prstGeom>
+          <a:solidFill>
+            <a:srgbClr val="FFFFFF"/>
+          </a:solidFill>
+          <a:ln w="19050">
+            <a:solidFill>
+              <a:srgbClr val="2563EB"/>
+            </a:solidFill>
+          </a:ln>
+          <a:effectLst/>
+        </p:spPr>
+        <p:style>
+          <a:lnRef idx="1">
+            <a:schemeClr val="accent1"/>
+          </a:lnRef>
+          <a:fillRef idx="3">
+            <a:schemeClr val="accent1"/>
+          </a:fillRef>
+          <a:effectRef idx="2">
+            <a:schemeClr val="accent1"/>
+          </a:effectRef>
+          <a:fontRef idx="minor">
+            <a:schemeClr val="lt1"/>
+          </a:fontRef>
+        </p:style>
+        <p:txBody>
+          <a:bodyPr rtlCol="0" anchor="ctr"/>
+          <a:lstStyle/>
+          <a:p>
+            <a:pPr algn="ctr"/>
+            <a:endParaRPr/>
+          </a:p>
+        </p:txBody>
+      </p:sp>
+      <p:sp>
+        <p:nvSpPr>
+          <p:cNvPr id="19" name="TextBox 18"/>
+          <p:cNvSpPr txBox="1"/>
+          <p:nvPr/>
+        </p:nvSpPr>
+        <p:spPr>
+          <a:xfrm>
+            <a:off x="3803903" y="2724912"/>
+            <a:ext cx="1536192" cy="768096"/>
+          </a:xfrm>
+          <a:prstGeom prst="rect">
+            <a:avLst/>
+          </a:prstGeom>
+          <a:noFill/>
+        </p:spPr>
+        <p:txBody>
+          <a:bodyPr wrap="square" lIns="0" tIns="0" rIns="0" bIns="0" anchor="ctr">
+            <a:spAutoFit/>
+          </a:bodyPr>
+          <a:lstStyle/>
+          <a:p>
+            <a:pPr algn="ctr">
+              <a:lnSpc>
+                <a:spcPct val="100000"/>
+              </a:lnSpc>
+            </a:pPr>
+            <a:r>
+              <a:rPr sz="1000" b="1" i="0">
+                <a:solidFill>
+                  <a:srgbClr val="2563EB"/>
+                </a:solidFill>
+                <a:latin typeface="Trebuchet MS"/>
+              </a:rPr>
+              <a:t>CONSOLIDATOR_PENDING</a:t>
+            </a:r>
+          </a:p>
+          <a:p>
+            <a:pPr algn="ctr">
+              <a:lnSpc>
+                <a:spcPct val="100000"/>
+              </a:lnSpc>
+            </a:pPr>
+            <a:r>
+              <a:rPr sz="950" b="0" i="0">
+                <a:solidFill>
+                  <a:srgbClr val="64748B"/>
+                </a:solidFill>
+                <a:latin typeface="Trebuchet MS"/>
+              </a:rPr>
+              <a:t>Étape 2</a:t>
+            </a:r>
+          </a:p>
+        </p:txBody>
+      </p:sp>
+      <p:sp>
+        <p:nvSpPr>
+          <p:cNvPr id="20" name="TextBox 19"/>
+          <p:cNvSpPr txBox="1"/>
+          <p:nvPr/>
+        </p:nvSpPr>
+        <p:spPr>
+          <a:xfrm>
+            <a:off x="5358384" y="1783080"/>
+            <a:ext cx="365760" cy="365760"/>
+          </a:xfrm>
+          <a:prstGeom prst="rect">
+            <a:avLst/>
+          </a:prstGeom>
+          <a:noFill/>
+        </p:spPr>
+        <p:txBody>
+          <a:bodyPr wrap="square" lIns="0" tIns="0" rIns="0" bIns="0" anchor="ctr">
+            <a:spAutoFit/>
+          </a:bodyPr>
+          <a:lstStyle/>
+          <a:p>
+            <a:pPr algn="ctr"/>
+            <a:r>
+              <a:rPr sz="1800" b="0" i="0">
+                <a:solidFill>
+                  <a:srgbClr val="D97706"/>
+                </a:solidFill>
+                <a:latin typeface="Calibri"/>
+              </a:rPr>
+              <a:t>↘</a:t>
+            </a:r>
+          </a:p>
+        </p:txBody>
+      </p:sp>
+      <p:sp>
+        <p:nvSpPr>
+          <p:cNvPr id="21" name="TextBox 20"/>
+          <p:cNvSpPr txBox="1"/>
+          <p:nvPr/>
+        </p:nvSpPr>
+        <p:spPr>
+          <a:xfrm>
+            <a:off x="5358384" y="2697480"/>
+            <a:ext cx="365760" cy="365760"/>
+          </a:xfrm>
+          <a:prstGeom prst="rect">
+            <a:avLst/>
+          </a:prstGeom>
+          <a:noFill/>
+        </p:spPr>
+        <p:txBody>
+          <a:bodyPr wrap="square" lIns="0" tIns="0" rIns="0" bIns="0" anchor="ctr">
+            <a:spAutoFit/>
+          </a:bodyPr>
+          <a:lstStyle/>
+          <a:p>
+            <a:pPr algn="ctr"/>
+            <a:r>
+              <a:rPr sz="1800" b="0" i="0">
+                <a:solidFill>
+                  <a:srgbClr val="D97706"/>
+                </a:solidFill>
+                <a:latin typeface="Calibri"/>
+              </a:rPr>
+              <a:t>↗</a:t>
+            </a:r>
+          </a:p>
+        </p:txBody>
+      </p:sp>
+      <p:sp>
+        <p:nvSpPr>
+          <p:cNvPr id="22" name="Rounded Rectangle 21"/>
+          <p:cNvSpPr/>
+          <p:nvPr/>
+        </p:nvSpPr>
+        <p:spPr>
+          <a:xfrm>
+            <a:off x="5669280" y="1737360"/>
+            <a:ext cx="1371600" cy="1371600"/>
+          </a:xfrm>
+          <a:prstGeom prst="roundRect">
+            <a:avLst/>
+          </a:prstGeom>
+          <a:solidFill>
+            <a:srgbClr val="FFFFFF"/>
+          </a:solidFill>
+          <a:ln w="19050">
+            <a:solidFill>
+              <a:srgbClr val="D97706"/>
+            </a:solidFill>
+          </a:ln>
+          <a:effectLst/>
+        </p:spPr>
+        <p:style>
+          <a:lnRef idx="1">
+            <a:schemeClr val="accent1"/>
+          </a:lnRef>
+          <a:fillRef idx="3">
+            <a:schemeClr val="accent1"/>
+          </a:fillRef>
+          <a:effectRef idx="2">
+            <a:schemeClr val="accent1"/>
+          </a:effectRef>
+          <a:fontRef idx="minor">
+            <a:schemeClr val="lt1"/>
+          </a:fontRef>
+        </p:style>
+        <p:txBody>
+          <a:bodyPr rtlCol="0" anchor="ctr"/>
+          <a:lstStyle/>
+          <a:p>
+            <a:pPr algn="ctr"/>
+            <a:endParaRPr/>
+          </a:p>
+        </p:txBody>
+      </p:sp>
+      <p:sp>
+        <p:nvSpPr>
+          <p:cNvPr id="23" name="Rectangle 22"/>
+          <p:cNvSpPr/>
+          <p:nvPr/>
+        </p:nvSpPr>
+        <p:spPr>
+          <a:xfrm>
+            <a:off x="5669280" y="1737360"/>
+            <a:ext cx="1371600" cy="274320"/>
+          </a:xfrm>
+          <a:prstGeom prst="rect">
+            <a:avLst/>
+          </a:prstGeom>
+          <a:solidFill>
+            <a:srgbClr val="D97706"/>
+          </a:solidFill>
+          <a:ln>
+            <a:noFill/>
+          </a:ln>
+          <a:effectLst/>
+        </p:spPr>
+        <p:style>
+          <a:lnRef idx="1">
+            <a:schemeClr val="accent1"/>
+          </a:lnRef>
+          <a:fillRef idx="3">
+            <a:schemeClr val="accent1"/>
+          </a:fillRef>
+          <a:effectRef idx="2">
+            <a:schemeClr val="accent1"/>
+          </a:effectRef>
+          <a:fontRef idx="minor">
+            <a:schemeClr val="lt1"/>
+          </a:fontRef>
+        </p:style>
+        <p:txBody>
+          <a:bodyPr rtlCol="0" anchor="ctr"/>
+          <a:lstStyle/>
+          <a:p>
+            <a:pPr algn="ctr"/>
+            <a:endParaRPr/>
+          </a:p>
+        </p:txBody>
+      </p:sp>
+      <p:sp>
+        <p:nvSpPr>
+          <p:cNvPr id="24" name="TextBox 23"/>
+          <p:cNvSpPr txBox="1"/>
+          <p:nvPr/>
+        </p:nvSpPr>
+        <p:spPr>
+          <a:xfrm>
+            <a:off x="5724144" y="2121408"/>
+            <a:ext cx="1261872" cy="932688"/>
+          </a:xfrm>
+          <a:prstGeom prst="rect">
+            <a:avLst/>
+          </a:prstGeom>
+          <a:noFill/>
+        </p:spPr>
+        <p:txBody>
+          <a:bodyPr wrap="square" lIns="0" tIns="0" rIns="0" bIns="0" anchor="t">
+            <a:spAutoFit/>
+          </a:bodyPr>
+          <a:lstStyle/>
+          <a:p>
+            <a:pPr algn="ctr">
+              <a:lnSpc>
+                <a:spcPct val="100000"/>
+              </a:lnSpc>
+            </a:pPr>
+            <a:r>
+              <a:rPr sz="1250" b="1" i="0">
+                <a:solidFill>
+                  <a:srgbClr val="D97706"/>
+                </a:solidFill>
+                <a:latin typeface="Trebuchet MS"/>
+              </a:rPr>
+              <a:t>Consolidateur</a:t>
+            </a:r>
+          </a:p>
+          <a:p>
+            <a:pPr algn="ctr">
+              <a:lnSpc>
+                <a:spcPct val="100000"/>
+              </a:lnSpc>
+            </a:pPr>
+            <a:r>
+              <a:rPr sz="1100" b="0" i="0">
+                <a:solidFill>
+                  <a:srgbClr val="334155"/>
+                </a:solidFill>
+                <a:latin typeface="Trebuchet MS"/>
+              </a:rPr>
+              <a:t>projet → direction → global</a:t>
+            </a:r>
+          </a:p>
+        </p:txBody>
+      </p:sp>
+      <p:sp>
+        <p:nvSpPr>
+          <p:cNvPr id="25" name="TextBox 24"/>
+          <p:cNvSpPr txBox="1"/>
+          <p:nvPr/>
+        </p:nvSpPr>
+        <p:spPr>
+          <a:xfrm>
+            <a:off x="7004304" y="2221991"/>
+            <a:ext cx="365760" cy="402336"/>
+          </a:xfrm>
+          <a:prstGeom prst="rect">
+            <a:avLst/>
+          </a:prstGeom>
+          <a:noFill/>
+        </p:spPr>
+        <p:txBody>
+          <a:bodyPr wrap="square" lIns="0" tIns="0" rIns="0" bIns="0" anchor="ctr">
+            <a:spAutoFit/>
+          </a:bodyPr>
+          <a:lstStyle/>
+          <a:p>
+            <a:pPr algn="ctr"/>
+            <a:r>
+              <a:rPr sz="2200" b="0" i="0">
+                <a:solidFill>
+                  <a:srgbClr val="F59E0B"/>
+                </a:solidFill>
+                <a:latin typeface="Calibri"/>
+              </a:rPr>
+              <a:t>→</a:t>
+            </a:r>
+          </a:p>
+        </p:txBody>
+      </p:sp>
+      <p:sp>
+        <p:nvSpPr>
+          <p:cNvPr id="26" name="Rounded Rectangle 25"/>
+          <p:cNvSpPr/>
+          <p:nvPr/>
+        </p:nvSpPr>
+        <p:spPr>
+          <a:xfrm>
+            <a:off x="7315200" y="1737360"/>
+            <a:ext cx="1463040" cy="1371600"/>
+          </a:xfrm>
+          <a:prstGeom prst="roundRect">
+            <a:avLst/>
+          </a:prstGeom>
+          <a:solidFill>
+            <a:srgbClr val="FFFFFF"/>
+          </a:solidFill>
+          <a:ln w="19050">
+            <a:solidFill>
+              <a:srgbClr val="059669"/>
+            </a:solidFill>
+          </a:ln>
+          <a:effectLst/>
+        </p:spPr>
+        <p:style>
+          <a:lnRef idx="1">
+            <a:schemeClr val="accent1"/>
+          </a:lnRef>
+          <a:fillRef idx="3">
+            <a:schemeClr val="accent1"/>
+          </a:fillRef>
+          <a:effectRef idx="2">
+            <a:schemeClr val="accent1"/>
+          </a:effectRef>
+          <a:fontRef idx="minor">
+            <a:schemeClr val="lt1"/>
+          </a:fontRef>
+        </p:style>
+        <p:txBody>
+          <a:bodyPr rtlCol="0" anchor="ctr"/>
+          <a:lstStyle/>
+          <a:p>
+            <a:pPr algn="ctr"/>
+            <a:endParaRPr/>
+          </a:p>
+        </p:txBody>
+      </p:sp>
+      <p:sp>
+        <p:nvSpPr>
+          <p:cNvPr id="27" name="Rectangle 26"/>
+          <p:cNvSpPr/>
+          <p:nvPr/>
+        </p:nvSpPr>
+        <p:spPr>
+          <a:xfrm>
+            <a:off x="7315200" y="1737360"/>
+            <a:ext cx="1463040" cy="274320"/>
+          </a:xfrm>
+          <a:prstGeom prst="rect">
+            <a:avLst/>
+          </a:prstGeom>
+          <a:solidFill>
+            <a:srgbClr val="059669"/>
+          </a:solidFill>
+          <a:ln>
+            <a:noFill/>
+          </a:ln>
+          <a:effectLst/>
+        </p:spPr>
+        <p:style>
+          <a:lnRef idx="1">
+            <a:schemeClr val="accent1"/>
+          </a:lnRef>
+          <a:fillRef idx="3">
+            <a:schemeClr val="accent1"/>
+          </a:fillRef>
+          <a:effectRef idx="2">
+            <a:schemeClr val="accent1"/>
+          </a:effectRef>
+          <a:fontRef idx="minor">
+            <a:schemeClr val="lt1"/>
+          </a:fontRef>
+        </p:style>
+        <p:txBody>
+          <a:bodyPr rtlCol="0" anchor="ctr"/>
+          <a:lstStyle/>
+          <a:p>
+            <a:pPr algn="ctr"/>
+            <a:endParaRPr/>
+          </a:p>
+        </p:txBody>
+      </p:sp>
+      <p:sp>
+        <p:nvSpPr>
+          <p:cNvPr id="28" name="TextBox 27"/>
+          <p:cNvSpPr txBox="1"/>
+          <p:nvPr/>
+        </p:nvSpPr>
+        <p:spPr>
+          <a:xfrm>
+            <a:off x="7370064" y="2103120"/>
+            <a:ext cx="1353312" cy="950976"/>
+          </a:xfrm>
+          <a:prstGeom prst="rect">
+            <a:avLst/>
+          </a:prstGeom>
+          <a:noFill/>
+        </p:spPr>
+        <p:txBody>
+          <a:bodyPr wrap="square" lIns="0" tIns="0" rIns="0" bIns="0" anchor="t">
+            <a:spAutoFit/>
+          </a:bodyPr>
+          <a:lstStyle/>
+          <a:p>
+            <a:pPr algn="ctr">
+              <a:lnSpc>
+                <a:spcPct val="100000"/>
+              </a:lnSpc>
+            </a:pPr>
+            <a:r>
+              <a:rPr sz="1250" b="1" i="0">
+                <a:solidFill>
+                  <a:srgbClr val="059669"/>
+                </a:solidFill>
+                <a:latin typeface="Trebuchet MS"/>
+              </a:rPr>
+              <a:t>Validé</a:t>
+            </a:r>
+          </a:p>
+          <a:p>
+            <a:pPr algn="ctr">
+              <a:lnSpc>
+                <a:spcPct val="100000"/>
+              </a:lnSpc>
+            </a:pPr>
+            <a:r>
+              <a:rPr sz="950" b="0" i="0">
+                <a:solidFill>
+                  <a:srgbClr val="64748B"/>
+                </a:solidFill>
+                <a:latin typeface="Trebuchet MS"/>
+              </a:rPr>
+              <a:t>Réunion :</a:t>
+            </a:r>
+          </a:p>
+          <a:p>
+            <a:pPr algn="ctr">
+              <a:lnSpc>
+                <a:spcPct val="100000"/>
+              </a:lnSpc>
+            </a:pPr>
+            <a:r>
+              <a:rPr sz="1000" b="1" i="0">
+                <a:solidFill>
+                  <a:srgbClr val="334155"/>
+                </a:solidFill>
+                <a:latin typeface="Trebuchet MS"/>
+              </a:rPr>
+              <a:t>CONFIRMED / SENT</a:t>
+            </a:r>
+          </a:p>
+          <a:p>
+            <a:pPr algn="ctr">
+              <a:lnSpc>
+                <a:spcPct val="100000"/>
+              </a:lnSpc>
+            </a:pPr>
+            <a:r>
+              <a:rPr sz="950" b="0" i="0">
+                <a:solidFill>
+                  <a:srgbClr val="64748B"/>
+                </a:solidFill>
+                <a:latin typeface="Trebuchet MS"/>
+              </a:rPr>
+              <a:t>Mission :</a:t>
+            </a:r>
+          </a:p>
+          <a:p>
+            <a:pPr algn="ctr">
+              <a:lnSpc>
+                <a:spcPct val="100000"/>
+              </a:lnSpc>
+            </a:pPr>
+            <a:r>
+              <a:rPr sz="1000" b="1" i="0">
+                <a:solidFill>
+                  <a:srgbClr val="334155"/>
+                </a:solidFill>
+                <a:latin typeface="Trebuchet MS"/>
+              </a:rPr>
+              <a:t>CONFIRMED</a:t>
+            </a:r>
+          </a:p>
+        </p:txBody>
+      </p:sp>
+      <p:sp>
+        <p:nvSpPr>
+          <p:cNvPr id="29" name="TextBox 28"/>
+          <p:cNvSpPr txBox="1"/>
+          <p:nvPr/>
+        </p:nvSpPr>
+        <p:spPr>
+          <a:xfrm>
+            <a:off x="7863840" y="3108960"/>
+            <a:ext cx="365760" cy="502920"/>
+          </a:xfrm>
+          <a:prstGeom prst="rect">
+            <a:avLst/>
+          </a:prstGeom>
+          <a:noFill/>
+        </p:spPr>
+        <p:txBody>
+          <a:bodyPr wrap="square" lIns="0" tIns="0" rIns="0" bIns="0" anchor="ctr">
+            <a:spAutoFit/>
+          </a:bodyPr>
+          <a:lstStyle/>
+          <a:p>
+            <a:pPr algn="ctr"/>
+            <a:r>
+              <a:rPr sz="2000" b="0" i="0">
+                <a:solidFill>
+                  <a:srgbClr val="F59E0B"/>
+                </a:solidFill>
+                <a:latin typeface="Calibri"/>
+              </a:rPr>
+              <a:t>↓</a:t>
+            </a:r>
+          </a:p>
+        </p:txBody>
+      </p:sp>
+      <p:sp>
+        <p:nvSpPr>
+          <p:cNvPr id="30" name="Rounded Rectangle 29"/>
+          <p:cNvSpPr/>
+          <p:nvPr/>
+        </p:nvSpPr>
+        <p:spPr>
+          <a:xfrm>
+            <a:off x="365760" y="3840480"/>
+            <a:ext cx="8412480" cy="621792"/>
+          </a:xfrm>
+          <a:prstGeom prst="roundRect">
+            <a:avLst/>
+          </a:prstGeom>
+          <a:solidFill>
+            <a:srgbClr val="1B3A6B"/>
+          </a:solidFill>
+          <a:ln w="12700">
+            <a:solidFill>
+              <a:srgbClr val="2563EB"/>
+            </a:solidFill>
+          </a:ln>
+          <a:effectLst/>
+        </p:spPr>
+        <p:style>
+          <a:lnRef idx="1">
+            <a:schemeClr val="accent1"/>
+          </a:lnRef>
+          <a:fillRef idx="3">
+            <a:schemeClr val="accent1"/>
+          </a:fillRef>
+          <a:effectRef idx="2">
+            <a:schemeClr val="accent1"/>
+          </a:effectRef>
+          <a:fontRef idx="minor">
+            <a:schemeClr val="lt1"/>
+          </a:fontRef>
+        </p:style>
+        <p:txBody>
+          <a:bodyPr rtlCol="0" anchor="ctr"/>
+          <a:lstStyle/>
+          <a:p>
+            <a:pPr algn="ctr"/>
+            <a:endParaRPr/>
+          </a:p>
+        </p:txBody>
+      </p:sp>
+      <p:sp>
+        <p:nvSpPr>
+          <p:cNvPr id="31" name="TextBox 30"/>
+          <p:cNvSpPr txBox="1"/>
+          <p:nvPr/>
+        </p:nvSpPr>
+        <p:spPr>
+          <a:xfrm>
+            <a:off x="640080" y="3840480"/>
+            <a:ext cx="8138160" cy="621792"/>
+          </a:xfrm>
+          <a:prstGeom prst="rect">
+            <a:avLst/>
+          </a:prstGeom>
+          <a:noFill/>
+        </p:spPr>
+        <p:txBody>
+          <a:bodyPr wrap="square" lIns="0" tIns="0" rIns="0" bIns="0" anchor="ctr">
+            <a:spAutoFit/>
+          </a:bodyPr>
+          <a:lstStyle/>
+          <a:p>
+            <a:pPr algn="l"/>
+            <a:r>
+              <a:rPr sz="1250" b="1" i="0">
+                <a:solidFill>
+                  <a:srgbClr val="FFFFFF"/>
+                </a:solidFill>
+                <a:latin typeface="Calibri"/>
+              </a:rPr>
+              <a:t>📅  Calendrier public</a:t>
+            </a:r>
+          </a:p>
+          <a:p>
+            <a:pPr algn="l"/>
+            <a:r>
+              <a:rPr sz="1100" b="0" i="0">
+                <a:solidFill>
+                  <a:srgbClr val="CADCFC"/>
+                </a:solidFill>
+                <a:latin typeface="Calibri"/>
+              </a:rPr>
+              <a:t>    —   dès la confirmation (réunion) ou l’envoi/confirmation (mission), l’événement est publié automatiquement sur le calendrier public.</a:t>
+            </a:r>
+          </a:p>
+        </p:txBody>
+      </p:sp>
+      <p:sp>
+        <p:nvSpPr>
+          <p:cNvPr id="32" name="TextBox 31"/>
+          <p:cNvSpPr txBox="1"/>
           <p:nvPr/>
         </p:nvSpPr>
         <p:spPr>
@@ -10048,30 +11429,50 @@
             <a:avLst/>
           </a:prstGeom>
           <a:noFill/>
-          <a:ln/>
-        </p:spPr>
-        <p:txBody>
-          <a:bodyPr wrap="square" lIns="0" tIns="0" rIns="0" bIns="0" rtlCol="0" anchor="ctr"/>
-          <a:lstStyle/>
-          <a:p>
-            <a:pPr marL="0" indent="0" algn="ctr">
-              <a:buNone/>
-            </a:pPr>
-            <a:r>
-              <a:rPr lang="en-US" sz="900" dirty="0">
-                <a:solidFill>
-                  <a:srgbClr val="8BAED4"/>
-                </a:solidFill>
-                <a:latin typeface="Calibri" pitchFamily="34" charset="0"/>
-                <a:ea typeface="Calibri" pitchFamily="34" charset="-122"/>
-                <a:cs typeface="Calibri" pitchFamily="34" charset="-120"/>
+        </p:spPr>
+        <p:txBody>
+          <a:bodyPr wrap="square" lIns="0" tIns="0" rIns="0" bIns="0" anchor="t">
+            <a:spAutoFit/>
+          </a:bodyPr>
+          <a:lstStyle/>
+          <a:p>
+            <a:pPr algn="ctr"/>
+            <a:r>
+              <a:rPr sz="900" b="0" i="0">
+                <a:solidFill>
+                  <a:srgbClr val="64748B"/>
+                </a:solidFill>
+                <a:latin typeface="Calibri"/>
               </a:rPr>
               <a:t>ADM GP  •  Application de Gestion de Planning  •  ADM 2026</a:t>
             </a:r>
-            <a:endParaRPr lang="en-US" sz="900" dirty="0"/>
-          </a:p>
-        </p:txBody>
-      </p:sp>
+          </a:p>
+        </p:txBody>
+      </p:sp>
+      <p:pic>
+        <p:nvPicPr>
+          <p:cNvPr id="33" name="Picture 32" descr="image.png"/>
+          <p:cNvPicPr>
+            <a:picLocks noChangeAspect="1"/>
+          </p:cNvPicPr>
+          <p:nvPr/>
+        </p:nvPicPr>
+        <p:blipFill>
+          <a:blip r:embed="rId2"/>
+          <a:stretch>
+            <a:fillRect/>
+          </a:stretch>
+        </p:blipFill>
+        <p:spPr>
+          <a:xfrm>
+            <a:off x="8485632" y="146304"/>
+            <a:ext cx="502920" cy="502920"/>
+          </a:xfrm>
+          <a:prstGeom prst="rect">
+            <a:avLst/>
+          </a:prstGeom>
+        </p:spPr>
+      </p:pic>
     </p:spTree>
   </p:cSld>
   <p:clrMapOvr>
@@ -11948,6 +13349,30 @@
           </a:p>
         </p:txBody>
       </p:sp>
+      <p:pic>
+        <p:nvPicPr>
+          <p:cNvPr id="54" name="Picture 53" descr="logo-gp-badge.png"/>
+          <p:cNvPicPr>
+            <a:picLocks noChangeAspect="1"/>
+          </p:cNvPicPr>
+          <p:nvPr/>
+        </p:nvPicPr>
+        <p:blipFill>
+          <a:blip r:embed="rId3"/>
+          <a:stretch>
+            <a:fillRect/>
+          </a:stretch>
+        </p:blipFill>
+        <p:spPr>
+          <a:xfrm>
+            <a:off x="8485632" y="146304"/>
+            <a:ext cx="502920" cy="502920"/>
+          </a:xfrm>
+          <a:prstGeom prst="rect">
+            <a:avLst/>
+          </a:prstGeom>
+        </p:spPr>
+      </p:pic>
     </p:spTree>
   </p:cSld>
   <p:clrMapOvr>
@@ -11957,6 +13382,304 @@
 </file>
 
 <file path=ppt/slides/slide20.xml><?xml version="1.0" encoding="utf-8"?>
+<p:sld xmlns:a="http://schemas.openxmlformats.org/drawingml/2006/main" xmlns:r="http://schemas.openxmlformats.org/officeDocument/2006/relationships" xmlns:p="http://schemas.openxmlformats.org/presentationml/2006/main">
+  <p:cSld name="Slide 19">
+    <p:spTree>
+      <p:nvGrpSpPr>
+        <p:cNvPr id="1" name=""/>
+        <p:cNvGrpSpPr/>
+        <p:nvPr/>
+      </p:nvGrpSpPr>
+      <p:grpSpPr>
+        <a:xfrm>
+          <a:off x="0" y="0"/>
+          <a:ext cx="0" cy="0"/>
+          <a:chOff x="0" y="0"/>
+          <a:chExt cx="0" cy="0"/>
+        </a:xfrm>
+      </p:grpSpPr>
+      <p:sp>
+        <p:nvSpPr>
+          <p:cNvPr id="2" name="Shape 0"/>
+          <p:cNvSpPr/>
+          <p:nvPr/>
+        </p:nvSpPr>
+        <p:spPr>
+          <a:xfrm>
+            <a:off x="0" y="0"/>
+            <a:ext cx="9144000" cy="5143500"/>
+          </a:xfrm>
+          <a:prstGeom prst="rect">
+            <a:avLst/>
+          </a:prstGeom>
+          <a:solidFill>
+            <a:srgbClr val="0D1F3C"/>
+          </a:solidFill>
+          <a:ln w="12700">
+            <a:solidFill>
+              <a:srgbClr val="0D1F3C"/>
+            </a:solidFill>
+            <a:prstDash val="solid"/>
+          </a:ln>
+        </p:spPr>
+        <p:txBody>
+          <a:bodyPr/>
+          <a:lstStyle/>
+          <a:p>
+            <a:endParaRPr lang="fr-SN"/>
+          </a:p>
+        </p:txBody>
+      </p:sp>
+      <p:sp>
+        <p:nvSpPr>
+          <p:cNvPr id="3" name="Shape 1"/>
+          <p:cNvSpPr/>
+          <p:nvPr/>
+        </p:nvSpPr>
+        <p:spPr>
+          <a:xfrm>
+            <a:off x="0" y="0"/>
+            <a:ext cx="320040" cy="5143500"/>
+          </a:xfrm>
+          <a:prstGeom prst="rect">
+            <a:avLst/>
+          </a:prstGeom>
+          <a:solidFill>
+            <a:srgbClr val="F59E0B"/>
+          </a:solidFill>
+          <a:ln w="12700">
+            <a:solidFill>
+              <a:srgbClr val="F59E0B"/>
+            </a:solidFill>
+            <a:prstDash val="solid"/>
+          </a:ln>
+        </p:spPr>
+        <p:txBody>
+          <a:bodyPr/>
+          <a:lstStyle/>
+          <a:p>
+            <a:endParaRPr lang="fr-SN"/>
+          </a:p>
+        </p:txBody>
+      </p:sp>
+      <p:sp>
+        <p:nvSpPr>
+          <p:cNvPr id="4" name="Shape 2"/>
+          <p:cNvSpPr/>
+          <p:nvPr/>
+        </p:nvSpPr>
+        <p:spPr>
+          <a:xfrm>
+            <a:off x="1005840" y="1280160"/>
+            <a:ext cx="1463040" cy="1463040"/>
+          </a:xfrm>
+          <a:prstGeom prst="ellipse">
+            <a:avLst/>
+          </a:prstGeom>
+          <a:solidFill>
+            <a:srgbClr val="1B3A6B"/>
+          </a:solidFill>
+          <a:ln w="25400">
+            <a:solidFill>
+              <a:srgbClr val="2563EB"/>
+            </a:solidFill>
+            <a:prstDash val="solid"/>
+          </a:ln>
+        </p:spPr>
+        <p:txBody>
+          <a:bodyPr/>
+          <a:lstStyle/>
+          <a:p>
+            <a:endParaRPr lang="fr-SN"/>
+          </a:p>
+        </p:txBody>
+      </p:sp>
+      <p:sp>
+        <p:nvSpPr>
+          <p:cNvPr id="5" name="Text 3"/>
+          <p:cNvSpPr/>
+          <p:nvPr/>
+        </p:nvSpPr>
+        <p:spPr>
+          <a:xfrm>
+            <a:off x="1005840" y="1280160"/>
+            <a:ext cx="1463040" cy="1463040"/>
+          </a:xfrm>
+          <a:prstGeom prst="rect">
+            <a:avLst/>
+          </a:prstGeom>
+          <a:noFill/>
+          <a:ln/>
+        </p:spPr>
+        <p:txBody>
+          <a:bodyPr wrap="square" lIns="0" tIns="0" rIns="0" bIns="0" rtlCol="0" anchor="ctr"/>
+          <a:lstStyle/>
+          <a:p>
+            <a:pPr marL="0" indent="0" algn="ctr">
+              <a:buNone/>
+            </a:pPr>
+            <a:r>
+              <a:rPr lang="en-US" sz="4000" dirty="0">
+                <a:solidFill>
+                  <a:srgbClr val="000000"/>
+                </a:solidFill>
+              </a:rPr>
+              <a:t>🏢</a:t>
+            </a:r>
+            <a:endParaRPr lang="en-US" sz="4000" dirty="0"/>
+          </a:p>
+        </p:txBody>
+      </p:sp>
+      <p:sp>
+        <p:nvSpPr>
+          <p:cNvPr id="6" name="Text 4"/>
+          <p:cNvSpPr/>
+          <p:nvPr/>
+        </p:nvSpPr>
+        <p:spPr>
+          <a:xfrm>
+            <a:off x="2743200" y="1463040"/>
+            <a:ext cx="5943600" cy="777240"/>
+          </a:xfrm>
+          <a:prstGeom prst="rect">
+            <a:avLst/>
+          </a:prstGeom>
+          <a:noFill/>
+          <a:ln/>
+        </p:spPr>
+        <p:txBody>
+          <a:bodyPr wrap="square" lIns="0" tIns="0" rIns="0" bIns="0" rtlCol="0" anchor="ctr"/>
+          <a:lstStyle/>
+          <a:p>
+            <a:pPr marL="0" indent="0">
+              <a:buNone/>
+            </a:pPr>
+            <a:r>
+              <a:rPr lang="en-US" sz="3800" b="1" dirty="0">
+                <a:solidFill>
+                  <a:srgbClr val="FFFFFF"/>
+                </a:solidFill>
+                <a:latin typeface="Trebuchet MS" pitchFamily="34" charset="0"/>
+                <a:ea typeface="Trebuchet MS" pitchFamily="34" charset="-122"/>
+                <a:cs typeface="Trebuchet MS" pitchFamily="34" charset="-120"/>
+              </a:rPr>
+              <a:t>Salles de Réunion</a:t>
+            </a:r>
+            <a:endParaRPr lang="en-US" sz="3800" dirty="0"/>
+          </a:p>
+        </p:txBody>
+      </p:sp>
+      <p:sp>
+        <p:nvSpPr>
+          <p:cNvPr id="7" name="Text 5"/>
+          <p:cNvSpPr/>
+          <p:nvPr/>
+        </p:nvSpPr>
+        <p:spPr>
+          <a:xfrm>
+            <a:off x="2743200" y="2331720"/>
+            <a:ext cx="5943600" cy="640080"/>
+          </a:xfrm>
+          <a:prstGeom prst="rect">
+            <a:avLst/>
+          </a:prstGeom>
+          <a:noFill/>
+          <a:ln/>
+        </p:spPr>
+        <p:txBody>
+          <a:bodyPr wrap="square" lIns="0" tIns="0" rIns="0" bIns="0" rtlCol="0" anchor="t"/>
+          <a:lstStyle/>
+          <a:p>
+            <a:pPr marL="0" indent="0">
+              <a:buNone/>
+            </a:pPr>
+            <a:r>
+              <a:rPr lang="en-US" sz="1800" dirty="0">
+                <a:solidFill>
+                  <a:srgbClr val="94A3B8"/>
+                </a:solidFill>
+                <a:latin typeface="Calibri" pitchFamily="34" charset="0"/>
+                <a:ea typeface="Calibri" pitchFamily="34" charset="-122"/>
+                <a:cs typeface="Calibri" pitchFamily="34" charset="-120"/>
+              </a:rPr>
+              <a:t>Gestion et occupation en temps réel</a:t>
+            </a:r>
+            <a:endParaRPr lang="en-US" sz="1800" dirty="0"/>
+          </a:p>
+        </p:txBody>
+      </p:sp>
+      <p:sp>
+        <p:nvSpPr>
+          <p:cNvPr id="8" name="Text 6"/>
+          <p:cNvSpPr/>
+          <p:nvPr/>
+        </p:nvSpPr>
+        <p:spPr>
+          <a:xfrm>
+            <a:off x="0" y="4800600"/>
+            <a:ext cx="9144000" cy="342900"/>
+          </a:xfrm>
+          <a:prstGeom prst="rect">
+            <a:avLst/>
+          </a:prstGeom>
+          <a:noFill/>
+          <a:ln/>
+        </p:spPr>
+        <p:txBody>
+          <a:bodyPr wrap="square" lIns="0" tIns="0" rIns="0" bIns="0" rtlCol="0" anchor="ctr"/>
+          <a:lstStyle/>
+          <a:p>
+            <a:pPr marL="0" indent="0" algn="ctr">
+              <a:buNone/>
+            </a:pPr>
+            <a:r>
+              <a:rPr lang="en-US" sz="900" dirty="0">
+                <a:solidFill>
+                  <a:srgbClr val="8BAED4"/>
+                </a:solidFill>
+                <a:latin typeface="Calibri" pitchFamily="34" charset="0"/>
+                <a:ea typeface="Calibri" pitchFamily="34" charset="-122"/>
+                <a:cs typeface="Calibri" pitchFamily="34" charset="-120"/>
+              </a:rPr>
+              <a:t>ADM GP  •  Application de Gestion de Planning  •  ADM 2026</a:t>
+            </a:r>
+            <a:endParaRPr lang="en-US" sz="900" dirty="0"/>
+          </a:p>
+        </p:txBody>
+      </p:sp>
+      <p:pic>
+        <p:nvPicPr>
+          <p:cNvPr id="9" name="Picture 8" descr="logo-gp-badge.png"/>
+          <p:cNvPicPr>
+            <a:picLocks noChangeAspect="1"/>
+          </p:cNvPicPr>
+          <p:nvPr/>
+        </p:nvPicPr>
+        <p:blipFill>
+          <a:blip r:embed="rId3"/>
+          <a:stretch>
+            <a:fillRect/>
+          </a:stretch>
+        </p:blipFill>
+        <p:spPr>
+          <a:xfrm>
+            <a:off x="8485632" y="146304"/>
+            <a:ext cx="502920" cy="502920"/>
+          </a:xfrm>
+          <a:prstGeom prst="rect">
+            <a:avLst/>
+          </a:prstGeom>
+        </p:spPr>
+      </p:pic>
+    </p:spTree>
+  </p:cSld>
+  <p:clrMapOvr>
+    <a:masterClrMapping/>
+  </p:clrMapOvr>
+</p:sld>
+</file>
+
+<file path=ppt/slides/slide21.xml><?xml version="1.0" encoding="utf-8"?>
 <p:sld xmlns:a="http://schemas.openxmlformats.org/drawingml/2006/main" xmlns:r="http://schemas.openxmlformats.org/officeDocument/2006/relationships" xmlns:p="http://schemas.openxmlformats.org/presentationml/2006/main">
   <p:cSld name="Slide 20">
     <p:spTree>
@@ -12696,6 +14419,30 @@
           </a:p>
         </p:txBody>
       </p:sp>
+      <p:pic>
+        <p:nvPicPr>
+          <p:cNvPr id="22" name="Picture 21" descr="logo-gp-badge.png"/>
+          <p:cNvPicPr>
+            <a:picLocks noChangeAspect="1"/>
+          </p:cNvPicPr>
+          <p:nvPr/>
+        </p:nvPicPr>
+        <p:blipFill>
+          <a:blip r:embed="rId3"/>
+          <a:stretch>
+            <a:fillRect/>
+          </a:stretch>
+        </p:blipFill>
+        <p:spPr>
+          <a:xfrm>
+            <a:off x="8485632" y="146304"/>
+            <a:ext cx="502920" cy="502920"/>
+          </a:xfrm>
+          <a:prstGeom prst="rect">
+            <a:avLst/>
+          </a:prstGeom>
+        </p:spPr>
+      </p:pic>
     </p:spTree>
   </p:cSld>
   <p:clrMapOvr>
@@ -12704,7 +14451,7 @@
 </p:sld>
 </file>
 
-<file path=ppt/slides/slide21.xml><?xml version="1.0" encoding="utf-8"?>
+<file path=ppt/slides/slide22.xml><?xml version="1.0" encoding="utf-8"?>
 <p:sld xmlns:a="http://schemas.openxmlformats.org/drawingml/2006/main" xmlns:r="http://schemas.openxmlformats.org/officeDocument/2006/relationships" xmlns:p="http://schemas.openxmlformats.org/presentationml/2006/main">
   <p:cSld name="Slide 21">
     <p:spTree>
@@ -12970,6 +14717,30 @@
           </a:p>
         </p:txBody>
       </p:sp>
+      <p:pic>
+        <p:nvPicPr>
+          <p:cNvPr id="9" name="Picture 8" descr="logo-gp-badge.png"/>
+          <p:cNvPicPr>
+            <a:picLocks noChangeAspect="1"/>
+          </p:cNvPicPr>
+          <p:nvPr/>
+        </p:nvPicPr>
+        <p:blipFill>
+          <a:blip r:embed="rId3"/>
+          <a:stretch>
+            <a:fillRect/>
+          </a:stretch>
+        </p:blipFill>
+        <p:spPr>
+          <a:xfrm>
+            <a:off x="8485632" y="146304"/>
+            <a:ext cx="502920" cy="502920"/>
+          </a:xfrm>
+          <a:prstGeom prst="rect">
+            <a:avLst/>
+          </a:prstGeom>
+        </p:spPr>
+      </p:pic>
     </p:spTree>
   </p:cSld>
   <p:clrMapOvr>
@@ -12978,7 +14749,7 @@
 </p:sld>
 </file>
 
-<file path=ppt/slides/slide22.xml><?xml version="1.0" encoding="utf-8"?>
+<file path=ppt/slides/slide23.xml><?xml version="1.0" encoding="utf-8"?>
 <p:sld xmlns:a="http://schemas.openxmlformats.org/drawingml/2006/main" xmlns:r="http://schemas.openxmlformats.org/officeDocument/2006/relationships" xmlns:p="http://schemas.openxmlformats.org/presentationml/2006/main">
   <p:cSld name="Slide 22">
     <p:spTree>
@@ -13718,6 +15489,30 @@
           </a:p>
         </p:txBody>
       </p:sp>
+      <p:pic>
+        <p:nvPicPr>
+          <p:cNvPr id="22" name="Picture 21" descr="logo-gp-badge.png"/>
+          <p:cNvPicPr>
+            <a:picLocks noChangeAspect="1"/>
+          </p:cNvPicPr>
+          <p:nvPr/>
+        </p:nvPicPr>
+        <p:blipFill>
+          <a:blip r:embed="rId3"/>
+          <a:stretch>
+            <a:fillRect/>
+          </a:stretch>
+        </p:blipFill>
+        <p:spPr>
+          <a:xfrm>
+            <a:off x="8485632" y="146304"/>
+            <a:ext cx="502920" cy="502920"/>
+          </a:xfrm>
+          <a:prstGeom prst="rect">
+            <a:avLst/>
+          </a:prstGeom>
+        </p:spPr>
+      </p:pic>
     </p:spTree>
   </p:cSld>
   <p:clrMapOvr>
@@ -13726,7 +15521,7 @@
 </p:sld>
 </file>
 
-<file path=ppt/slides/slide23.xml><?xml version="1.0" encoding="utf-8"?>
+<file path=ppt/slides/slide24.xml><?xml version="1.0" encoding="utf-8"?>
 <p:sld xmlns:a="http://schemas.openxmlformats.org/drawingml/2006/main" xmlns:r="http://schemas.openxmlformats.org/officeDocument/2006/relationships" xmlns:p="http://schemas.openxmlformats.org/presentationml/2006/main">
   <p:cSld name="Slide 23">
     <p:spTree>
@@ -13992,6 +15787,30 @@
           </a:p>
         </p:txBody>
       </p:sp>
+      <p:pic>
+        <p:nvPicPr>
+          <p:cNvPr id="9" name="Picture 8" descr="logo-gp-badge.png"/>
+          <p:cNvPicPr>
+            <a:picLocks noChangeAspect="1"/>
+          </p:cNvPicPr>
+          <p:nvPr/>
+        </p:nvPicPr>
+        <p:blipFill>
+          <a:blip r:embed="rId3"/>
+          <a:stretch>
+            <a:fillRect/>
+          </a:stretch>
+        </p:blipFill>
+        <p:spPr>
+          <a:xfrm>
+            <a:off x="8485632" y="146304"/>
+            <a:ext cx="502920" cy="502920"/>
+          </a:xfrm>
+          <a:prstGeom prst="rect">
+            <a:avLst/>
+          </a:prstGeom>
+        </p:spPr>
+      </p:pic>
     </p:spTree>
   </p:cSld>
   <p:clrMapOvr>
@@ -14000,7 +15819,7 @@
 </p:sld>
 </file>
 
-<file path=ppt/slides/slide24.xml><?xml version="1.0" encoding="utf-8"?>
+<file path=ppt/slides/slide25.xml><?xml version="1.0" encoding="utf-8"?>
 <p:sld xmlns:a="http://schemas.openxmlformats.org/drawingml/2006/main" xmlns:r="http://schemas.openxmlformats.org/officeDocument/2006/relationships" xmlns:p="http://schemas.openxmlformats.org/presentationml/2006/main">
   <p:cSld name="Slide 24">
     <p:spTree>
@@ -14740,6 +16559,30 @@
           </a:p>
         </p:txBody>
       </p:sp>
+      <p:pic>
+        <p:nvPicPr>
+          <p:cNvPr id="22" name="Picture 21" descr="logo-gp-badge.png"/>
+          <p:cNvPicPr>
+            <a:picLocks noChangeAspect="1"/>
+          </p:cNvPicPr>
+          <p:nvPr/>
+        </p:nvPicPr>
+        <p:blipFill>
+          <a:blip r:embed="rId3"/>
+          <a:stretch>
+            <a:fillRect/>
+          </a:stretch>
+        </p:blipFill>
+        <p:spPr>
+          <a:xfrm>
+            <a:off x="8485632" y="146304"/>
+            <a:ext cx="502920" cy="502920"/>
+          </a:xfrm>
+          <a:prstGeom prst="rect">
+            <a:avLst/>
+          </a:prstGeom>
+        </p:spPr>
+      </p:pic>
     </p:spTree>
   </p:cSld>
   <p:clrMapOvr>
@@ -14748,7 +16591,7 @@
 </p:sld>
 </file>
 
-<file path=ppt/slides/slide25.xml><?xml version="1.0" encoding="utf-8"?>
+<file path=ppt/slides/slide26.xml><?xml version="1.0" encoding="utf-8"?>
 <p:sld xmlns:a="http://schemas.openxmlformats.org/drawingml/2006/main" xmlns:r="http://schemas.openxmlformats.org/officeDocument/2006/relationships" xmlns:p="http://schemas.openxmlformats.org/presentationml/2006/main">
   <p:cSld name="Slide 25">
     <p:spTree>
@@ -15014,6 +16857,30 @@
           </a:p>
         </p:txBody>
       </p:sp>
+      <p:pic>
+        <p:nvPicPr>
+          <p:cNvPr id="9" name="Picture 8" descr="logo-gp-badge.png"/>
+          <p:cNvPicPr>
+            <a:picLocks noChangeAspect="1"/>
+          </p:cNvPicPr>
+          <p:nvPr/>
+        </p:nvPicPr>
+        <p:blipFill>
+          <a:blip r:embed="rId3"/>
+          <a:stretch>
+            <a:fillRect/>
+          </a:stretch>
+        </p:blipFill>
+        <p:spPr>
+          <a:xfrm>
+            <a:off x="8485632" y="146304"/>
+            <a:ext cx="502920" cy="502920"/>
+          </a:xfrm>
+          <a:prstGeom prst="rect">
+            <a:avLst/>
+          </a:prstGeom>
+        </p:spPr>
+      </p:pic>
     </p:spTree>
   </p:cSld>
   <p:clrMapOvr>
@@ -15022,7 +16889,7 @@
 </p:sld>
 </file>
 
-<file path=ppt/slides/slide26.xml><?xml version="1.0" encoding="utf-8"?>
+<file path=ppt/slides/slide27.xml><?xml version="1.0" encoding="utf-8"?>
 <p:sld xmlns:a="http://schemas.openxmlformats.org/drawingml/2006/main" xmlns:r="http://schemas.openxmlformats.org/officeDocument/2006/relationships" xmlns:p="http://schemas.openxmlformats.org/presentationml/2006/main">
   <p:cSld name="Slide 26">
     <p:spTree>
@@ -15918,6 +17785,30 @@
           </a:p>
         </p:txBody>
       </p:sp>
+      <p:pic>
+        <p:nvPicPr>
+          <p:cNvPr id="26" name="Picture 25" descr="logo-gp-badge.png"/>
+          <p:cNvPicPr>
+            <a:picLocks noChangeAspect="1"/>
+          </p:cNvPicPr>
+          <p:nvPr/>
+        </p:nvPicPr>
+        <p:blipFill>
+          <a:blip r:embed="rId3"/>
+          <a:stretch>
+            <a:fillRect/>
+          </a:stretch>
+        </p:blipFill>
+        <p:spPr>
+          <a:xfrm>
+            <a:off x="8485632" y="146304"/>
+            <a:ext cx="502920" cy="502920"/>
+          </a:xfrm>
+          <a:prstGeom prst="rect">
+            <a:avLst/>
+          </a:prstGeom>
+        </p:spPr>
+      </p:pic>
     </p:spTree>
   </p:cSld>
   <p:clrMapOvr>
@@ -15926,7 +17817,7 @@
 </p:sld>
 </file>
 
-<file path=ppt/slides/slide27.xml><?xml version="1.0" encoding="utf-8"?>
+<file path=ppt/slides/slide28.xml><?xml version="1.0" encoding="utf-8"?>
 <p:sld xmlns:a="http://schemas.openxmlformats.org/drawingml/2006/main" xmlns:r="http://schemas.openxmlformats.org/officeDocument/2006/relationships" xmlns:p="http://schemas.openxmlformats.org/presentationml/2006/main">
   <p:cSld name="Slide 27">
     <p:spTree>
@@ -16192,6 +18083,30 @@
           </a:p>
         </p:txBody>
       </p:sp>
+      <p:pic>
+        <p:nvPicPr>
+          <p:cNvPr id="9" name="Picture 8" descr="logo-gp-badge.png"/>
+          <p:cNvPicPr>
+            <a:picLocks noChangeAspect="1"/>
+          </p:cNvPicPr>
+          <p:nvPr/>
+        </p:nvPicPr>
+        <p:blipFill>
+          <a:blip r:embed="rId3"/>
+          <a:stretch>
+            <a:fillRect/>
+          </a:stretch>
+        </p:blipFill>
+        <p:spPr>
+          <a:xfrm>
+            <a:off x="8485632" y="146304"/>
+            <a:ext cx="502920" cy="502920"/>
+          </a:xfrm>
+          <a:prstGeom prst="rect">
+            <a:avLst/>
+          </a:prstGeom>
+        </p:spPr>
+      </p:pic>
     </p:spTree>
   </p:cSld>
   <p:clrMapOvr>
@@ -16200,7 +18115,7 @@
 </p:sld>
 </file>
 
-<file path=ppt/slides/slide28.xml><?xml version="1.0" encoding="utf-8"?>
+<file path=ppt/slides/slide29.xml><?xml version="1.0" encoding="utf-8"?>
 <p:sld xmlns:a="http://schemas.openxmlformats.org/drawingml/2006/main" xmlns:r="http://schemas.openxmlformats.org/officeDocument/2006/relationships" xmlns:p="http://schemas.openxmlformats.org/presentationml/2006/main">
   <p:cSld name="Slide 28">
     <p:spTree>
@@ -16940,280 +18855,30 @@
           </a:p>
         </p:txBody>
       </p:sp>
-    </p:spTree>
-  </p:cSld>
-  <p:clrMapOvr>
-    <a:masterClrMapping/>
-  </p:clrMapOvr>
-</p:sld>
-</file>
-
-<file path=ppt/slides/slide29.xml><?xml version="1.0" encoding="utf-8"?>
-<p:sld xmlns:a="http://schemas.openxmlformats.org/drawingml/2006/main" xmlns:r="http://schemas.openxmlformats.org/officeDocument/2006/relationships" xmlns:p="http://schemas.openxmlformats.org/presentationml/2006/main">
-  <p:cSld name="Slide 29">
-    <p:spTree>
-      <p:nvGrpSpPr>
-        <p:cNvPr id="1" name=""/>
-        <p:cNvGrpSpPr/>
-        <p:nvPr/>
-      </p:nvGrpSpPr>
-      <p:grpSpPr>
-        <a:xfrm>
-          <a:off x="0" y="0"/>
-          <a:ext cx="0" cy="0"/>
-          <a:chOff x="0" y="0"/>
-          <a:chExt cx="0" cy="0"/>
-        </a:xfrm>
-      </p:grpSpPr>
-      <p:sp>
-        <p:nvSpPr>
-          <p:cNvPr id="2" name="Shape 0"/>
-          <p:cNvSpPr/>
-          <p:nvPr/>
-        </p:nvSpPr>
-        <p:spPr>
-          <a:xfrm>
-            <a:off x="0" y="0"/>
-            <a:ext cx="9144000" cy="5143500"/>
-          </a:xfrm>
-          <a:prstGeom prst="rect">
-            <a:avLst/>
-          </a:prstGeom>
-          <a:solidFill>
-            <a:srgbClr val="0D1F3C"/>
-          </a:solidFill>
-          <a:ln w="12700">
-            <a:solidFill>
-              <a:srgbClr val="0D1F3C"/>
-            </a:solidFill>
-            <a:prstDash val="solid"/>
-          </a:ln>
-        </p:spPr>
-        <p:txBody>
-          <a:bodyPr/>
-          <a:lstStyle/>
-          <a:p>
-            <a:endParaRPr lang="fr-SN"/>
-          </a:p>
-        </p:txBody>
-      </p:sp>
-      <p:sp>
-        <p:nvSpPr>
-          <p:cNvPr id="3" name="Shape 1"/>
-          <p:cNvSpPr/>
-          <p:nvPr/>
-        </p:nvSpPr>
-        <p:spPr>
-          <a:xfrm>
-            <a:off x="0" y="0"/>
-            <a:ext cx="320040" cy="5143500"/>
-          </a:xfrm>
-          <a:prstGeom prst="rect">
-            <a:avLst/>
-          </a:prstGeom>
-          <a:solidFill>
-            <a:srgbClr val="F59E0B"/>
-          </a:solidFill>
-          <a:ln w="12700">
-            <a:solidFill>
-              <a:srgbClr val="F59E0B"/>
-            </a:solidFill>
-            <a:prstDash val="solid"/>
-          </a:ln>
-        </p:spPr>
-        <p:txBody>
-          <a:bodyPr/>
-          <a:lstStyle/>
-          <a:p>
-            <a:endParaRPr lang="fr-SN"/>
-          </a:p>
-        </p:txBody>
-      </p:sp>
-      <p:sp>
-        <p:nvSpPr>
-          <p:cNvPr id="4" name="Shape 2"/>
-          <p:cNvSpPr/>
-          <p:nvPr/>
-        </p:nvSpPr>
-        <p:spPr>
-          <a:xfrm>
-            <a:off x="1005840" y="1280160"/>
-            <a:ext cx="1463040" cy="1463040"/>
-          </a:xfrm>
-          <a:prstGeom prst="ellipse">
-            <a:avLst/>
-          </a:prstGeom>
-          <a:solidFill>
-            <a:srgbClr val="1B3A6B"/>
-          </a:solidFill>
-          <a:ln w="25400">
-            <a:solidFill>
-              <a:srgbClr val="2563EB"/>
-            </a:solidFill>
-            <a:prstDash val="solid"/>
-          </a:ln>
-        </p:spPr>
-        <p:txBody>
-          <a:bodyPr/>
-          <a:lstStyle/>
-          <a:p>
-            <a:endParaRPr lang="fr-SN"/>
-          </a:p>
-        </p:txBody>
-      </p:sp>
-      <p:sp>
-        <p:nvSpPr>
-          <p:cNvPr id="5" name="Text 3"/>
-          <p:cNvSpPr/>
-          <p:nvPr/>
-        </p:nvSpPr>
-        <p:spPr>
-          <a:xfrm>
-            <a:off x="1005840" y="1280160"/>
-            <a:ext cx="1463040" cy="1463040"/>
-          </a:xfrm>
-          <a:prstGeom prst="rect">
-            <a:avLst/>
-          </a:prstGeom>
-          <a:noFill/>
-          <a:ln/>
-        </p:spPr>
-        <p:txBody>
-          <a:bodyPr wrap="square" lIns="0" tIns="0" rIns="0" bIns="0" rtlCol="0" anchor="ctr"/>
-          <a:lstStyle/>
-          <a:p>
-            <a:pPr marL="0" indent="0" algn="ctr">
-              <a:buNone/>
-            </a:pPr>
-            <a:r>
-              <a:rPr lang="en-US" sz="4000" dirty="0">
-                <a:solidFill>
-                  <a:srgbClr val="000000"/>
-                </a:solidFill>
-              </a:rPr>
-              <a:t>👤</a:t>
-            </a:r>
-            <a:endParaRPr lang="en-US" sz="4000" dirty="0"/>
-          </a:p>
-        </p:txBody>
-      </p:sp>
-      <p:sp>
-        <p:nvSpPr>
-          <p:cNvPr id="6" name="Text 4"/>
-          <p:cNvSpPr/>
-          <p:nvPr/>
-        </p:nvSpPr>
-        <p:spPr>
-          <a:xfrm>
-            <a:off x="2743200" y="1463040"/>
-            <a:ext cx="5943600" cy="777240"/>
-          </a:xfrm>
-          <a:prstGeom prst="rect">
-            <a:avLst/>
-          </a:prstGeom>
-          <a:noFill/>
-          <a:ln/>
-        </p:spPr>
-        <p:txBody>
-          <a:bodyPr wrap="square" lIns="0" tIns="0" rIns="0" bIns="0" rtlCol="0" anchor="ctr"/>
-          <a:lstStyle/>
-          <a:p>
-            <a:pPr marL="0" indent="0">
-              <a:buNone/>
-            </a:pPr>
-            <a:r>
-              <a:rPr lang="en-US" sz="3800" b="1" dirty="0">
-                <a:solidFill>
-                  <a:srgbClr val="FFFFFF"/>
-                </a:solidFill>
-                <a:latin typeface="Trebuchet MS" pitchFamily="34" charset="0"/>
-                <a:ea typeface="Trebuchet MS" pitchFamily="34" charset="-122"/>
-                <a:cs typeface="Trebuchet MS" pitchFamily="34" charset="-120"/>
-              </a:rPr>
-              <a:t>Mon Profil</a:t>
-            </a:r>
-            <a:endParaRPr lang="en-US" sz="3800" dirty="0"/>
-          </a:p>
-        </p:txBody>
-      </p:sp>
-      <p:sp>
-        <p:nvSpPr>
-          <p:cNvPr id="7" name="Text 5"/>
-          <p:cNvSpPr/>
-          <p:nvPr/>
-        </p:nvSpPr>
-        <p:spPr>
-          <a:xfrm>
-            <a:off x="2743200" y="2331720"/>
-            <a:ext cx="5943600" cy="640080"/>
-          </a:xfrm>
-          <a:prstGeom prst="rect">
-            <a:avLst/>
-          </a:prstGeom>
-          <a:noFill/>
-          <a:ln/>
-        </p:spPr>
-        <p:txBody>
-          <a:bodyPr wrap="square" lIns="0" tIns="0" rIns="0" bIns="0" rtlCol="0" anchor="t"/>
-          <a:lstStyle/>
-          <a:p>
-            <a:pPr marL="0" indent="0">
-              <a:buNone/>
-            </a:pPr>
-            <a:r>
-              <a:rPr lang="en-US" sz="1800" dirty="0">
-                <a:solidFill>
-                  <a:srgbClr val="94A3B8"/>
-                </a:solidFill>
-                <a:latin typeface="Calibri" pitchFamily="34" charset="0"/>
-                <a:ea typeface="Calibri" pitchFamily="34" charset="-122"/>
-                <a:cs typeface="Calibri" pitchFamily="34" charset="-120"/>
-              </a:rPr>
-              <a:t>Gestion du compte et sécurité personnelle</a:t>
-            </a:r>
-            <a:endParaRPr lang="en-US" sz="1800" dirty="0"/>
-          </a:p>
-        </p:txBody>
-      </p:sp>
-      <p:sp>
-        <p:nvSpPr>
-          <p:cNvPr id="8" name="Text 6"/>
-          <p:cNvSpPr/>
-          <p:nvPr/>
-        </p:nvSpPr>
-        <p:spPr>
-          <a:xfrm>
-            <a:off x="0" y="4800600"/>
-            <a:ext cx="9144000" cy="342900"/>
-          </a:xfrm>
-          <a:prstGeom prst="rect">
-            <a:avLst/>
-          </a:prstGeom>
-          <a:noFill/>
-          <a:ln/>
-        </p:spPr>
-        <p:txBody>
-          <a:bodyPr wrap="square" lIns="0" tIns="0" rIns="0" bIns="0" rtlCol="0" anchor="ctr"/>
-          <a:lstStyle/>
-          <a:p>
-            <a:pPr marL="0" indent="0" algn="ctr">
-              <a:buNone/>
-            </a:pPr>
-            <a:r>
-              <a:rPr lang="en-US" sz="900" dirty="0">
-                <a:solidFill>
-                  <a:srgbClr val="8BAED4"/>
-                </a:solidFill>
-                <a:latin typeface="Calibri" pitchFamily="34" charset="0"/>
-                <a:ea typeface="Calibri" pitchFamily="34" charset="-122"/>
-                <a:cs typeface="Calibri" pitchFamily="34" charset="-120"/>
-              </a:rPr>
-              <a:t>ADM GP  •  Application de Gestion de Planning  •  ADM 2026</a:t>
-            </a:r>
-            <a:endParaRPr lang="en-US" sz="900" dirty="0"/>
-          </a:p>
-        </p:txBody>
-      </p:sp>
+      <p:pic>
+        <p:nvPicPr>
+          <p:cNvPr id="22" name="Picture 21" descr="logo-gp-badge.png"/>
+          <p:cNvPicPr>
+            <a:picLocks noChangeAspect="1"/>
+          </p:cNvPicPr>
+          <p:nvPr/>
+        </p:nvPicPr>
+        <p:blipFill>
+          <a:blip r:embed="rId3"/>
+          <a:stretch>
+            <a:fillRect/>
+          </a:stretch>
+        </p:blipFill>
+        <p:spPr>
+          <a:xfrm>
+            <a:off x="8485632" y="146304"/>
+            <a:ext cx="502920" cy="502920"/>
+          </a:xfrm>
+          <a:prstGeom prst="rect">
+            <a:avLst/>
+          </a:prstGeom>
+        </p:spPr>
+      </p:pic>
     </p:spTree>
   </p:cSld>
   <p:clrMapOvr>
@@ -18260,6 +19925,30 @@
           </a:p>
         </p:txBody>
       </p:sp>
+      <p:pic>
+        <p:nvPicPr>
+          <p:cNvPr id="27" name="Picture 26" descr="logo-gp-badge.png"/>
+          <p:cNvPicPr>
+            <a:picLocks noChangeAspect="1"/>
+          </p:cNvPicPr>
+          <p:nvPr/>
+        </p:nvPicPr>
+        <p:blipFill>
+          <a:blip r:embed="rId3"/>
+          <a:stretch>
+            <a:fillRect/>
+          </a:stretch>
+        </p:blipFill>
+        <p:spPr>
+          <a:xfrm>
+            <a:off x="8485632" y="146304"/>
+            <a:ext cx="502920" cy="502920"/>
+          </a:xfrm>
+          <a:prstGeom prst="rect">
+            <a:avLst/>
+          </a:prstGeom>
+        </p:spPr>
+      </p:pic>
     </p:spTree>
   </p:cSld>
   <p:clrMapOvr>
@@ -18269,6 +19958,304 @@
 </file>
 
 <file path=ppt/slides/slide30.xml><?xml version="1.0" encoding="utf-8"?>
+<p:sld xmlns:a="http://schemas.openxmlformats.org/drawingml/2006/main" xmlns:r="http://schemas.openxmlformats.org/officeDocument/2006/relationships" xmlns:p="http://schemas.openxmlformats.org/presentationml/2006/main">
+  <p:cSld name="Slide 29">
+    <p:spTree>
+      <p:nvGrpSpPr>
+        <p:cNvPr id="1" name=""/>
+        <p:cNvGrpSpPr/>
+        <p:nvPr/>
+      </p:nvGrpSpPr>
+      <p:grpSpPr>
+        <a:xfrm>
+          <a:off x="0" y="0"/>
+          <a:ext cx="0" cy="0"/>
+          <a:chOff x="0" y="0"/>
+          <a:chExt cx="0" cy="0"/>
+        </a:xfrm>
+      </p:grpSpPr>
+      <p:sp>
+        <p:nvSpPr>
+          <p:cNvPr id="2" name="Shape 0"/>
+          <p:cNvSpPr/>
+          <p:nvPr/>
+        </p:nvSpPr>
+        <p:spPr>
+          <a:xfrm>
+            <a:off x="0" y="0"/>
+            <a:ext cx="9144000" cy="5143500"/>
+          </a:xfrm>
+          <a:prstGeom prst="rect">
+            <a:avLst/>
+          </a:prstGeom>
+          <a:solidFill>
+            <a:srgbClr val="0D1F3C"/>
+          </a:solidFill>
+          <a:ln w="12700">
+            <a:solidFill>
+              <a:srgbClr val="0D1F3C"/>
+            </a:solidFill>
+            <a:prstDash val="solid"/>
+          </a:ln>
+        </p:spPr>
+        <p:txBody>
+          <a:bodyPr/>
+          <a:lstStyle/>
+          <a:p>
+            <a:endParaRPr lang="fr-SN"/>
+          </a:p>
+        </p:txBody>
+      </p:sp>
+      <p:sp>
+        <p:nvSpPr>
+          <p:cNvPr id="3" name="Shape 1"/>
+          <p:cNvSpPr/>
+          <p:nvPr/>
+        </p:nvSpPr>
+        <p:spPr>
+          <a:xfrm>
+            <a:off x="0" y="0"/>
+            <a:ext cx="320040" cy="5143500"/>
+          </a:xfrm>
+          <a:prstGeom prst="rect">
+            <a:avLst/>
+          </a:prstGeom>
+          <a:solidFill>
+            <a:srgbClr val="F59E0B"/>
+          </a:solidFill>
+          <a:ln w="12700">
+            <a:solidFill>
+              <a:srgbClr val="F59E0B"/>
+            </a:solidFill>
+            <a:prstDash val="solid"/>
+          </a:ln>
+        </p:spPr>
+        <p:txBody>
+          <a:bodyPr/>
+          <a:lstStyle/>
+          <a:p>
+            <a:endParaRPr lang="fr-SN"/>
+          </a:p>
+        </p:txBody>
+      </p:sp>
+      <p:sp>
+        <p:nvSpPr>
+          <p:cNvPr id="4" name="Shape 2"/>
+          <p:cNvSpPr/>
+          <p:nvPr/>
+        </p:nvSpPr>
+        <p:spPr>
+          <a:xfrm>
+            <a:off x="1005840" y="1280160"/>
+            <a:ext cx="1463040" cy="1463040"/>
+          </a:xfrm>
+          <a:prstGeom prst="ellipse">
+            <a:avLst/>
+          </a:prstGeom>
+          <a:solidFill>
+            <a:srgbClr val="1B3A6B"/>
+          </a:solidFill>
+          <a:ln w="25400">
+            <a:solidFill>
+              <a:srgbClr val="2563EB"/>
+            </a:solidFill>
+            <a:prstDash val="solid"/>
+          </a:ln>
+        </p:spPr>
+        <p:txBody>
+          <a:bodyPr/>
+          <a:lstStyle/>
+          <a:p>
+            <a:endParaRPr lang="fr-SN"/>
+          </a:p>
+        </p:txBody>
+      </p:sp>
+      <p:sp>
+        <p:nvSpPr>
+          <p:cNvPr id="5" name="Text 3"/>
+          <p:cNvSpPr/>
+          <p:nvPr/>
+        </p:nvSpPr>
+        <p:spPr>
+          <a:xfrm>
+            <a:off x="1005840" y="1280160"/>
+            <a:ext cx="1463040" cy="1463040"/>
+          </a:xfrm>
+          <a:prstGeom prst="rect">
+            <a:avLst/>
+          </a:prstGeom>
+          <a:noFill/>
+          <a:ln/>
+        </p:spPr>
+        <p:txBody>
+          <a:bodyPr wrap="square" lIns="0" tIns="0" rIns="0" bIns="0" rtlCol="0" anchor="ctr"/>
+          <a:lstStyle/>
+          <a:p>
+            <a:pPr marL="0" indent="0" algn="ctr">
+              <a:buNone/>
+            </a:pPr>
+            <a:r>
+              <a:rPr lang="en-US" sz="4000" dirty="0">
+                <a:solidFill>
+                  <a:srgbClr val="000000"/>
+                </a:solidFill>
+              </a:rPr>
+              <a:t>👤</a:t>
+            </a:r>
+            <a:endParaRPr lang="en-US" sz="4000" dirty="0"/>
+          </a:p>
+        </p:txBody>
+      </p:sp>
+      <p:sp>
+        <p:nvSpPr>
+          <p:cNvPr id="6" name="Text 4"/>
+          <p:cNvSpPr/>
+          <p:nvPr/>
+        </p:nvSpPr>
+        <p:spPr>
+          <a:xfrm>
+            <a:off x="2743200" y="1463040"/>
+            <a:ext cx="5943600" cy="777240"/>
+          </a:xfrm>
+          <a:prstGeom prst="rect">
+            <a:avLst/>
+          </a:prstGeom>
+          <a:noFill/>
+          <a:ln/>
+        </p:spPr>
+        <p:txBody>
+          <a:bodyPr wrap="square" lIns="0" tIns="0" rIns="0" bIns="0" rtlCol="0" anchor="ctr"/>
+          <a:lstStyle/>
+          <a:p>
+            <a:pPr marL="0" indent="0">
+              <a:buNone/>
+            </a:pPr>
+            <a:r>
+              <a:rPr lang="en-US" sz="3800" b="1" dirty="0">
+                <a:solidFill>
+                  <a:srgbClr val="FFFFFF"/>
+                </a:solidFill>
+                <a:latin typeface="Trebuchet MS" pitchFamily="34" charset="0"/>
+                <a:ea typeface="Trebuchet MS" pitchFamily="34" charset="-122"/>
+                <a:cs typeface="Trebuchet MS" pitchFamily="34" charset="-120"/>
+              </a:rPr>
+              <a:t>Mon Profil</a:t>
+            </a:r>
+            <a:endParaRPr lang="en-US" sz="3800" dirty="0"/>
+          </a:p>
+        </p:txBody>
+      </p:sp>
+      <p:sp>
+        <p:nvSpPr>
+          <p:cNvPr id="7" name="Text 5"/>
+          <p:cNvSpPr/>
+          <p:nvPr/>
+        </p:nvSpPr>
+        <p:spPr>
+          <a:xfrm>
+            <a:off x="2743200" y="2331720"/>
+            <a:ext cx="5943600" cy="640080"/>
+          </a:xfrm>
+          <a:prstGeom prst="rect">
+            <a:avLst/>
+          </a:prstGeom>
+          <a:noFill/>
+          <a:ln/>
+        </p:spPr>
+        <p:txBody>
+          <a:bodyPr wrap="square" lIns="0" tIns="0" rIns="0" bIns="0" rtlCol="0" anchor="t"/>
+          <a:lstStyle/>
+          <a:p>
+            <a:pPr marL="0" indent="0">
+              <a:buNone/>
+            </a:pPr>
+            <a:r>
+              <a:rPr lang="en-US" sz="1800" dirty="0">
+                <a:solidFill>
+                  <a:srgbClr val="94A3B8"/>
+                </a:solidFill>
+                <a:latin typeface="Calibri" pitchFamily="34" charset="0"/>
+                <a:ea typeface="Calibri" pitchFamily="34" charset="-122"/>
+                <a:cs typeface="Calibri" pitchFamily="34" charset="-120"/>
+              </a:rPr>
+              <a:t>Gestion du compte et sécurité personnelle</a:t>
+            </a:r>
+            <a:endParaRPr lang="en-US" sz="1800" dirty="0"/>
+          </a:p>
+        </p:txBody>
+      </p:sp>
+      <p:sp>
+        <p:nvSpPr>
+          <p:cNvPr id="8" name="Text 6"/>
+          <p:cNvSpPr/>
+          <p:nvPr/>
+        </p:nvSpPr>
+        <p:spPr>
+          <a:xfrm>
+            <a:off x="0" y="4800600"/>
+            <a:ext cx="9144000" cy="342900"/>
+          </a:xfrm>
+          <a:prstGeom prst="rect">
+            <a:avLst/>
+          </a:prstGeom>
+          <a:noFill/>
+          <a:ln/>
+        </p:spPr>
+        <p:txBody>
+          <a:bodyPr wrap="square" lIns="0" tIns="0" rIns="0" bIns="0" rtlCol="0" anchor="ctr"/>
+          <a:lstStyle/>
+          <a:p>
+            <a:pPr marL="0" indent="0" algn="ctr">
+              <a:buNone/>
+            </a:pPr>
+            <a:r>
+              <a:rPr lang="en-US" sz="900" dirty="0">
+                <a:solidFill>
+                  <a:srgbClr val="8BAED4"/>
+                </a:solidFill>
+                <a:latin typeface="Calibri" pitchFamily="34" charset="0"/>
+                <a:ea typeface="Calibri" pitchFamily="34" charset="-122"/>
+                <a:cs typeface="Calibri" pitchFamily="34" charset="-120"/>
+              </a:rPr>
+              <a:t>ADM GP  •  Application de Gestion de Planning  •  ADM 2026</a:t>
+            </a:r>
+            <a:endParaRPr lang="en-US" sz="900" dirty="0"/>
+          </a:p>
+        </p:txBody>
+      </p:sp>
+      <p:pic>
+        <p:nvPicPr>
+          <p:cNvPr id="9" name="Picture 8" descr="logo-gp-badge.png"/>
+          <p:cNvPicPr>
+            <a:picLocks noChangeAspect="1"/>
+          </p:cNvPicPr>
+          <p:nvPr/>
+        </p:nvPicPr>
+        <p:blipFill>
+          <a:blip r:embed="rId3"/>
+          <a:stretch>
+            <a:fillRect/>
+          </a:stretch>
+        </p:blipFill>
+        <p:spPr>
+          <a:xfrm>
+            <a:off x="8485632" y="146304"/>
+            <a:ext cx="502920" cy="502920"/>
+          </a:xfrm>
+          <a:prstGeom prst="rect">
+            <a:avLst/>
+          </a:prstGeom>
+        </p:spPr>
+      </p:pic>
+    </p:spTree>
+  </p:cSld>
+  <p:clrMapOvr>
+    <a:masterClrMapping/>
+  </p:clrMapOvr>
+</p:sld>
+</file>
+
+<file path=ppt/slides/slide31.xml><?xml version="1.0" encoding="utf-8"?>
 <p:sld xmlns:a="http://schemas.openxmlformats.org/drawingml/2006/main" xmlns:r="http://schemas.openxmlformats.org/officeDocument/2006/relationships" xmlns:p="http://schemas.openxmlformats.org/presentationml/2006/main">
   <p:cSld name="Slide 30">
     <p:spTree>
@@ -19008,6 +20995,30 @@
           </a:p>
         </p:txBody>
       </p:sp>
+      <p:pic>
+        <p:nvPicPr>
+          <p:cNvPr id="22" name="Picture 21" descr="logo-gp-badge.png"/>
+          <p:cNvPicPr>
+            <a:picLocks noChangeAspect="1"/>
+          </p:cNvPicPr>
+          <p:nvPr/>
+        </p:nvPicPr>
+        <p:blipFill>
+          <a:blip r:embed="rId3"/>
+          <a:stretch>
+            <a:fillRect/>
+          </a:stretch>
+        </p:blipFill>
+        <p:spPr>
+          <a:xfrm>
+            <a:off x="8485632" y="146304"/>
+            <a:ext cx="502920" cy="502920"/>
+          </a:xfrm>
+          <a:prstGeom prst="rect">
+            <a:avLst/>
+          </a:prstGeom>
+        </p:spPr>
+      </p:pic>
     </p:spTree>
   </p:cSld>
   <p:clrMapOvr>
@@ -19016,7 +21027,7 @@
 </p:sld>
 </file>
 
-<file path=ppt/slides/slide31.xml><?xml version="1.0" encoding="utf-8"?>
+<file path=ppt/slides/slide32.xml><?xml version="1.0" encoding="utf-8"?>
 <p:sld xmlns:a="http://schemas.openxmlformats.org/drawingml/2006/main" xmlns:r="http://schemas.openxmlformats.org/officeDocument/2006/relationships" xmlns:p="http://schemas.openxmlformats.org/presentationml/2006/main">
   <p:cSld name="Slide 31">
     <p:spTree>
@@ -19282,6 +21293,30 @@
           </a:p>
         </p:txBody>
       </p:sp>
+      <p:pic>
+        <p:nvPicPr>
+          <p:cNvPr id="9" name="Picture 8" descr="logo-gp-badge.png"/>
+          <p:cNvPicPr>
+            <a:picLocks noChangeAspect="1"/>
+          </p:cNvPicPr>
+          <p:nvPr/>
+        </p:nvPicPr>
+        <p:blipFill>
+          <a:blip r:embed="rId3"/>
+          <a:stretch>
+            <a:fillRect/>
+          </a:stretch>
+        </p:blipFill>
+        <p:spPr>
+          <a:xfrm>
+            <a:off x="8485632" y="146304"/>
+            <a:ext cx="502920" cy="502920"/>
+          </a:xfrm>
+          <a:prstGeom prst="rect">
+            <a:avLst/>
+          </a:prstGeom>
+        </p:spPr>
+      </p:pic>
     </p:spTree>
   </p:cSld>
   <p:clrMapOvr>
@@ -19290,7 +21325,7 @@
 </p:sld>
 </file>
 
-<file path=ppt/slides/slide32.xml><?xml version="1.0" encoding="utf-8"?>
+<file path=ppt/slides/slide33.xml><?xml version="1.0" encoding="utf-8"?>
 <p:sld xmlns:a="http://schemas.openxmlformats.org/drawingml/2006/main" xmlns:r="http://schemas.openxmlformats.org/officeDocument/2006/relationships" xmlns:p="http://schemas.openxmlformats.org/presentationml/2006/main">
   <p:cSld name="Slide 32">
     <p:spTree>
@@ -20030,6 +22065,30 @@
           </a:p>
         </p:txBody>
       </p:sp>
+      <p:pic>
+        <p:nvPicPr>
+          <p:cNvPr id="22" name="Picture 21" descr="logo-gp-badge.png"/>
+          <p:cNvPicPr>
+            <a:picLocks noChangeAspect="1"/>
+          </p:cNvPicPr>
+          <p:nvPr/>
+        </p:nvPicPr>
+        <p:blipFill>
+          <a:blip r:embed="rId3"/>
+          <a:stretch>
+            <a:fillRect/>
+          </a:stretch>
+        </p:blipFill>
+        <p:spPr>
+          <a:xfrm>
+            <a:off x="8485632" y="146304"/>
+            <a:ext cx="502920" cy="502920"/>
+          </a:xfrm>
+          <a:prstGeom prst="rect">
+            <a:avLst/>
+          </a:prstGeom>
+        </p:spPr>
+      </p:pic>
     </p:spTree>
   </p:cSld>
   <p:clrMapOvr>
@@ -20038,7 +22097,7 @@
 </p:sld>
 </file>
 
-<file path=ppt/slides/slide33.xml><?xml version="1.0" encoding="utf-8"?>
+<file path=ppt/slides/slide34.xml><?xml version="1.0" encoding="utf-8"?>
 <p:sld xmlns:a="http://schemas.openxmlformats.org/drawingml/2006/main" xmlns:r="http://schemas.openxmlformats.org/officeDocument/2006/relationships" xmlns:p="http://schemas.openxmlformats.org/presentationml/2006/main">
   <p:cSld name="Slide 33">
     <p:spTree>
@@ -20778,6 +22837,30 @@
           </a:p>
         </p:txBody>
       </p:sp>
+      <p:pic>
+        <p:nvPicPr>
+          <p:cNvPr id="22" name="Picture 21" descr="logo-gp-badge.png"/>
+          <p:cNvPicPr>
+            <a:picLocks noChangeAspect="1"/>
+          </p:cNvPicPr>
+          <p:nvPr/>
+        </p:nvPicPr>
+        <p:blipFill>
+          <a:blip r:embed="rId3"/>
+          <a:stretch>
+            <a:fillRect/>
+          </a:stretch>
+        </p:blipFill>
+        <p:spPr>
+          <a:xfrm>
+            <a:off x="8485632" y="146304"/>
+            <a:ext cx="502920" cy="502920"/>
+          </a:xfrm>
+          <a:prstGeom prst="rect">
+            <a:avLst/>
+          </a:prstGeom>
+        </p:spPr>
+      </p:pic>
     </p:spTree>
   </p:cSld>
   <p:clrMapOvr>
@@ -20786,7 +22869,7 @@
 </p:sld>
 </file>
 
-<file path=ppt/slides/slide34.xml><?xml version="1.0" encoding="utf-8"?>
+<file path=ppt/slides/slide35.xml><?xml version="1.0" encoding="utf-8"?>
 <p:sld xmlns:a="http://schemas.openxmlformats.org/drawingml/2006/main" xmlns:r="http://schemas.openxmlformats.org/officeDocument/2006/relationships" xmlns:p="http://schemas.openxmlformats.org/presentationml/2006/main">
   <p:cSld name="Slide 34">
     <p:spTree>
@@ -21526,6 +23609,30 @@
           </a:p>
         </p:txBody>
       </p:sp>
+      <p:pic>
+        <p:nvPicPr>
+          <p:cNvPr id="22" name="Picture 21" descr="logo-gp-badge.png"/>
+          <p:cNvPicPr>
+            <a:picLocks noChangeAspect="1"/>
+          </p:cNvPicPr>
+          <p:nvPr/>
+        </p:nvPicPr>
+        <p:blipFill>
+          <a:blip r:embed="rId3"/>
+          <a:stretch>
+            <a:fillRect/>
+          </a:stretch>
+        </p:blipFill>
+        <p:spPr>
+          <a:xfrm>
+            <a:off x="8485632" y="146304"/>
+            <a:ext cx="502920" cy="502920"/>
+          </a:xfrm>
+          <a:prstGeom prst="rect">
+            <a:avLst/>
+          </a:prstGeom>
+        </p:spPr>
+      </p:pic>
     </p:spTree>
   </p:cSld>
   <p:clrMapOvr>
@@ -21534,7 +23641,7 @@
 </p:sld>
 </file>
 
-<file path=ppt/slides/slide35.xml><?xml version="1.0" encoding="utf-8"?>
+<file path=ppt/slides/slide36.xml><?xml version="1.0" encoding="utf-8"?>
 <p:sld xmlns:a="http://schemas.openxmlformats.org/drawingml/2006/main" xmlns:r="http://schemas.openxmlformats.org/officeDocument/2006/relationships" xmlns:p="http://schemas.openxmlformats.org/presentationml/2006/main">
   <p:cSld name="Slide 35">
     <p:spTree>
@@ -22274,6 +24381,30 @@
           </a:p>
         </p:txBody>
       </p:sp>
+      <p:pic>
+        <p:nvPicPr>
+          <p:cNvPr id="22" name="Picture 21" descr="logo-gp-badge.png"/>
+          <p:cNvPicPr>
+            <a:picLocks noChangeAspect="1"/>
+          </p:cNvPicPr>
+          <p:nvPr/>
+        </p:nvPicPr>
+        <p:blipFill>
+          <a:blip r:embed="rId3"/>
+          <a:stretch>
+            <a:fillRect/>
+          </a:stretch>
+        </p:blipFill>
+        <p:spPr>
+          <a:xfrm>
+            <a:off x="8485632" y="146304"/>
+            <a:ext cx="502920" cy="502920"/>
+          </a:xfrm>
+          <a:prstGeom prst="rect">
+            <a:avLst/>
+          </a:prstGeom>
+        </p:spPr>
+      </p:pic>
     </p:spTree>
   </p:cSld>
   <p:clrMapOvr>
@@ -22282,7 +24413,7 @@
 </p:sld>
 </file>
 
-<file path=ppt/slides/slide36.xml><?xml version="1.0" encoding="utf-8"?>
+<file path=ppt/slides/slide37.xml><?xml version="1.0" encoding="utf-8"?>
 <p:sld xmlns:a="http://schemas.openxmlformats.org/drawingml/2006/main" xmlns:r="http://schemas.openxmlformats.org/officeDocument/2006/relationships" xmlns:p="http://schemas.openxmlformats.org/presentationml/2006/main">
   <p:cSld name="Slide 36">
     <p:spTree>
@@ -22548,6 +24679,30 @@
           </a:p>
         </p:txBody>
       </p:sp>
+      <p:pic>
+        <p:nvPicPr>
+          <p:cNvPr id="9" name="Picture 8" descr="logo-gp-badge.png"/>
+          <p:cNvPicPr>
+            <a:picLocks noChangeAspect="1"/>
+          </p:cNvPicPr>
+          <p:nvPr/>
+        </p:nvPicPr>
+        <p:blipFill>
+          <a:blip r:embed="rId3"/>
+          <a:stretch>
+            <a:fillRect/>
+          </a:stretch>
+        </p:blipFill>
+        <p:spPr>
+          <a:xfrm>
+            <a:off x="8485632" y="146304"/>
+            <a:ext cx="502920" cy="502920"/>
+          </a:xfrm>
+          <a:prstGeom prst="rect">
+            <a:avLst/>
+          </a:prstGeom>
+        </p:spPr>
+      </p:pic>
     </p:spTree>
   </p:cSld>
   <p:clrMapOvr>
@@ -22556,7 +24711,7 @@
 </p:sld>
 </file>
 
-<file path=ppt/slides/slide37.xml><?xml version="1.0" encoding="utf-8"?>
+<file path=ppt/slides/slide38.xml><?xml version="1.0" encoding="utf-8"?>
 <p:sld xmlns:a="http://schemas.openxmlformats.org/drawingml/2006/main" xmlns:r="http://schemas.openxmlformats.org/officeDocument/2006/relationships" xmlns:p="http://schemas.openxmlformats.org/presentationml/2006/main">
   <p:cSld name="Slide 37">
     <p:spTree>
@@ -24259,6 +26414,30 @@
           </a:p>
         </p:txBody>
       </p:sp>
+      <p:pic>
+        <p:nvPicPr>
+          <p:cNvPr id="49" name="Picture 48" descr="logo-gp-badge.png"/>
+          <p:cNvPicPr>
+            <a:picLocks noChangeAspect="1"/>
+          </p:cNvPicPr>
+          <p:nvPr/>
+        </p:nvPicPr>
+        <p:blipFill>
+          <a:blip r:embed="rId3"/>
+          <a:stretch>
+            <a:fillRect/>
+          </a:stretch>
+        </p:blipFill>
+        <p:spPr>
+          <a:xfrm>
+            <a:off x="8485632" y="146304"/>
+            <a:ext cx="502920" cy="502920"/>
+          </a:xfrm>
+          <a:prstGeom prst="rect">
+            <a:avLst/>
+          </a:prstGeom>
+        </p:spPr>
+      </p:pic>
     </p:spTree>
   </p:cSld>
   <p:clrMapOvr>
@@ -24267,7 +26446,7 @@
 </p:sld>
 </file>
 
-<file path=ppt/slides/slide38.xml><?xml version="1.0" encoding="utf-8"?>
+<file path=ppt/slides/slide39.xml><?xml version="1.0" encoding="utf-8"?>
 <p:sld xmlns:a="http://schemas.openxmlformats.org/drawingml/2006/main" xmlns:r="http://schemas.openxmlformats.org/officeDocument/2006/relationships" xmlns:p="http://schemas.openxmlformats.org/presentationml/2006/main">
   <p:cSld name="Slide 38">
     <p:spTree>
@@ -24561,6 +26740,30 @@
           </a:p>
         </p:txBody>
       </p:sp>
+      <p:pic>
+        <p:nvPicPr>
+          <p:cNvPr id="10" name="Picture 9" descr="logo-gp-badge.png"/>
+          <p:cNvPicPr>
+            <a:picLocks noChangeAspect="1"/>
+          </p:cNvPicPr>
+          <p:nvPr/>
+        </p:nvPicPr>
+        <p:blipFill>
+          <a:blip r:embed="rId3"/>
+          <a:stretch>
+            <a:fillRect/>
+          </a:stretch>
+        </p:blipFill>
+        <p:spPr>
+          <a:xfrm>
+            <a:off x="6263640" y="1234440"/>
+            <a:ext cx="2331720" cy="2331720"/>
+          </a:xfrm>
+          <a:prstGeom prst="rect">
+            <a:avLst/>
+          </a:prstGeom>
+        </p:spPr>
+      </p:pic>
     </p:spTree>
   </p:cSld>
   <p:clrMapOvr>
@@ -24835,6 +27038,30 @@
           </a:p>
         </p:txBody>
       </p:sp>
+      <p:pic>
+        <p:nvPicPr>
+          <p:cNvPr id="9" name="Picture 8" descr="logo-gp-badge.png"/>
+          <p:cNvPicPr>
+            <a:picLocks noChangeAspect="1"/>
+          </p:cNvPicPr>
+          <p:nvPr/>
+        </p:nvPicPr>
+        <p:blipFill>
+          <a:blip r:embed="rId3"/>
+          <a:stretch>
+            <a:fillRect/>
+          </a:stretch>
+        </p:blipFill>
+        <p:spPr>
+          <a:xfrm>
+            <a:off x="8485632" y="146304"/>
+            <a:ext cx="502920" cy="502920"/>
+          </a:xfrm>
+          <a:prstGeom prst="rect">
+            <a:avLst/>
+          </a:prstGeom>
+        </p:spPr>
+      </p:pic>
     </p:spTree>
   </p:cSld>
   <p:clrMapOvr>
@@ -25583,6 +27810,30 @@
           </a:p>
         </p:txBody>
       </p:sp>
+      <p:pic>
+        <p:nvPicPr>
+          <p:cNvPr id="22" name="Picture 21" descr="logo-gp-badge.png"/>
+          <p:cNvPicPr>
+            <a:picLocks noChangeAspect="1"/>
+          </p:cNvPicPr>
+          <p:nvPr/>
+        </p:nvPicPr>
+        <p:blipFill>
+          <a:blip r:embed="rId3"/>
+          <a:stretch>
+            <a:fillRect/>
+          </a:stretch>
+        </p:blipFill>
+        <p:spPr>
+          <a:xfrm>
+            <a:off x="8485632" y="146304"/>
+            <a:ext cx="502920" cy="502920"/>
+          </a:xfrm>
+          <a:prstGeom prst="rect">
+            <a:avLst/>
+          </a:prstGeom>
+        </p:spPr>
+      </p:pic>
     </p:spTree>
   </p:cSld>
   <p:clrMapOvr>
@@ -25857,6 +28108,30 @@
           </a:p>
         </p:txBody>
       </p:sp>
+      <p:pic>
+        <p:nvPicPr>
+          <p:cNvPr id="9" name="Picture 8" descr="logo-gp-badge.png"/>
+          <p:cNvPicPr>
+            <a:picLocks noChangeAspect="1"/>
+          </p:cNvPicPr>
+          <p:nvPr/>
+        </p:nvPicPr>
+        <p:blipFill>
+          <a:blip r:embed="rId3"/>
+          <a:stretch>
+            <a:fillRect/>
+          </a:stretch>
+        </p:blipFill>
+        <p:spPr>
+          <a:xfrm>
+            <a:off x="8485632" y="146304"/>
+            <a:ext cx="502920" cy="502920"/>
+          </a:xfrm>
+          <a:prstGeom prst="rect">
+            <a:avLst/>
+          </a:prstGeom>
+        </p:spPr>
+      </p:pic>
     </p:spTree>
   </p:cSld>
   <p:clrMapOvr>
@@ -26605,6 +28880,30 @@
           </a:p>
         </p:txBody>
       </p:sp>
+      <p:pic>
+        <p:nvPicPr>
+          <p:cNvPr id="22" name="Picture 21" descr="logo-gp-badge.png"/>
+          <p:cNvPicPr>
+            <a:picLocks noChangeAspect="1"/>
+          </p:cNvPicPr>
+          <p:nvPr/>
+        </p:nvPicPr>
+        <p:blipFill>
+          <a:blip r:embed="rId3"/>
+          <a:stretch>
+            <a:fillRect/>
+          </a:stretch>
+        </p:blipFill>
+        <p:spPr>
+          <a:xfrm>
+            <a:off x="8485632" y="146304"/>
+            <a:ext cx="502920" cy="502920"/>
+          </a:xfrm>
+          <a:prstGeom prst="rect">
+            <a:avLst/>
+          </a:prstGeom>
+        </p:spPr>
+      </p:pic>
     </p:spTree>
   </p:cSld>
   <p:clrMapOvr>
@@ -26879,6 +29178,30 @@
           </a:p>
         </p:txBody>
       </p:sp>
+      <p:pic>
+        <p:nvPicPr>
+          <p:cNvPr id="9" name="Picture 8" descr="logo-gp-badge.png"/>
+          <p:cNvPicPr>
+            <a:picLocks noChangeAspect="1"/>
+          </p:cNvPicPr>
+          <p:nvPr/>
+        </p:nvPicPr>
+        <p:blipFill>
+          <a:blip r:embed="rId3"/>
+          <a:stretch>
+            <a:fillRect/>
+          </a:stretch>
+        </p:blipFill>
+        <p:spPr>
+          <a:xfrm>
+            <a:off x="8485632" y="146304"/>
+            <a:ext cx="502920" cy="502920"/>
+          </a:xfrm>
+          <a:prstGeom prst="rect">
+            <a:avLst/>
+          </a:prstGeom>
+        </p:spPr>
+      </p:pic>
     </p:spTree>
   </p:cSld>
   <p:clrMapOvr>
@@ -27627,6 +29950,30 @@
           </a:p>
         </p:txBody>
       </p:sp>
+      <p:pic>
+        <p:nvPicPr>
+          <p:cNvPr id="22" name="Picture 21" descr="logo-gp-badge.png"/>
+          <p:cNvPicPr>
+            <a:picLocks noChangeAspect="1"/>
+          </p:cNvPicPr>
+          <p:nvPr/>
+        </p:nvPicPr>
+        <p:blipFill>
+          <a:blip r:embed="rId3"/>
+          <a:stretch>
+            <a:fillRect/>
+          </a:stretch>
+        </p:blipFill>
+        <p:spPr>
+          <a:xfrm>
+            <a:off x="8485632" y="146304"/>
+            <a:ext cx="502920" cy="502920"/>
+          </a:xfrm>
+          <a:prstGeom prst="rect">
+            <a:avLst/>
+          </a:prstGeom>
+        </p:spPr>
+      </p:pic>
     </p:spTree>
   </p:cSld>
   <p:clrMapOvr>
